--- a/3_RTOS与嵌入式程序设计.pptx
+++ b/3_RTOS与嵌入式程序设计.pptx
@@ -12,9 +12,20 @@
     <p:sldId id="261" r:id="rId6"/>
     <p:sldId id="260" r:id="rId7"/>
     <p:sldId id="265" r:id="rId8"/>
-    <p:sldId id="264" r:id="rId9"/>
-    <p:sldId id="262" r:id="rId10"/>
-    <p:sldId id="263" r:id="rId11"/>
+    <p:sldId id="276" r:id="rId9"/>
+    <p:sldId id="277" r:id="rId10"/>
+    <p:sldId id="278" r:id="rId11"/>
+    <p:sldId id="273" r:id="rId12"/>
+    <p:sldId id="283" r:id="rId13"/>
+    <p:sldId id="284" r:id="rId14"/>
+    <p:sldId id="285" r:id="rId15"/>
+    <p:sldId id="279" r:id="rId16"/>
+    <p:sldId id="286" r:id="rId17"/>
+    <p:sldId id="262" r:id="rId18"/>
+    <p:sldId id="263" r:id="rId19"/>
+    <p:sldId id="288" r:id="rId20"/>
+    <p:sldId id="275" r:id="rId21"/>
+    <p:sldId id="282" r:id="rId22"/>
   </p:sldIdLst>
   <p:sldSz cx="12192000" cy="6858000"/>
   <p:notesSz cx="6858000" cy="9144000"/>
@@ -270,7 +281,7 @@
           <a:p>
             <a:fld id="{F77C1FC0-184B-423F-A6A0-E4853DE7D68D}" type="datetimeFigureOut">
               <a:rPr lang="zh-SG" altLang="en-US" smtClean="0"/>
-              <a:t>2026/07/11</a:t>
+              <a:t>2026/07/12</a:t>
             </a:fld>
             <a:endParaRPr lang="zh-SG" altLang="en-US"/>
           </a:p>
@@ -470,7 +481,7 @@
           <a:p>
             <a:fld id="{F77C1FC0-184B-423F-A6A0-E4853DE7D68D}" type="datetimeFigureOut">
               <a:rPr lang="zh-SG" altLang="en-US" smtClean="0"/>
-              <a:t>2026/07/11</a:t>
+              <a:t>2026/07/12</a:t>
             </a:fld>
             <a:endParaRPr lang="zh-SG" altLang="en-US"/>
           </a:p>
@@ -680,7 +691,7 @@
           <a:p>
             <a:fld id="{F77C1FC0-184B-423F-A6A0-E4853DE7D68D}" type="datetimeFigureOut">
               <a:rPr lang="zh-SG" altLang="en-US" smtClean="0"/>
-              <a:t>2026/07/11</a:t>
+              <a:t>2026/07/12</a:t>
             </a:fld>
             <a:endParaRPr lang="zh-SG" altLang="en-US"/>
           </a:p>
@@ -880,7 +891,7 @@
           <a:p>
             <a:fld id="{F77C1FC0-184B-423F-A6A0-E4853DE7D68D}" type="datetimeFigureOut">
               <a:rPr lang="zh-SG" altLang="en-US" smtClean="0"/>
-              <a:t>2026/07/11</a:t>
+              <a:t>2026/07/12</a:t>
             </a:fld>
             <a:endParaRPr lang="zh-SG" altLang="en-US"/>
           </a:p>
@@ -1156,7 +1167,7 @@
           <a:p>
             <a:fld id="{F77C1FC0-184B-423F-A6A0-E4853DE7D68D}" type="datetimeFigureOut">
               <a:rPr lang="zh-SG" altLang="en-US" smtClean="0"/>
-              <a:t>2026/07/11</a:t>
+              <a:t>2026/07/12</a:t>
             </a:fld>
             <a:endParaRPr lang="zh-SG" altLang="en-US"/>
           </a:p>
@@ -1424,7 +1435,7 @@
           <a:p>
             <a:fld id="{F77C1FC0-184B-423F-A6A0-E4853DE7D68D}" type="datetimeFigureOut">
               <a:rPr lang="zh-SG" altLang="en-US" smtClean="0"/>
-              <a:t>2026/07/11</a:t>
+              <a:t>2026/07/12</a:t>
             </a:fld>
             <a:endParaRPr lang="zh-SG" altLang="en-US"/>
           </a:p>
@@ -1839,7 +1850,7 @@
           <a:p>
             <a:fld id="{F77C1FC0-184B-423F-A6A0-E4853DE7D68D}" type="datetimeFigureOut">
               <a:rPr lang="zh-SG" altLang="en-US" smtClean="0"/>
-              <a:t>2026/07/11</a:t>
+              <a:t>2026/07/12</a:t>
             </a:fld>
             <a:endParaRPr lang="zh-SG" altLang="en-US"/>
           </a:p>
@@ -1981,7 +1992,7 @@
           <a:p>
             <a:fld id="{F77C1FC0-184B-423F-A6A0-E4853DE7D68D}" type="datetimeFigureOut">
               <a:rPr lang="zh-SG" altLang="en-US" smtClean="0"/>
-              <a:t>2026/07/11</a:t>
+              <a:t>2026/07/12</a:t>
             </a:fld>
             <a:endParaRPr lang="zh-SG" altLang="en-US"/>
           </a:p>
@@ -2094,7 +2105,7 @@
           <a:p>
             <a:fld id="{F77C1FC0-184B-423F-A6A0-E4853DE7D68D}" type="datetimeFigureOut">
               <a:rPr lang="zh-SG" altLang="en-US" smtClean="0"/>
-              <a:t>2026/07/11</a:t>
+              <a:t>2026/07/12</a:t>
             </a:fld>
             <a:endParaRPr lang="zh-SG" altLang="en-US"/>
           </a:p>
@@ -2407,7 +2418,7 @@
           <a:p>
             <a:fld id="{F77C1FC0-184B-423F-A6A0-E4853DE7D68D}" type="datetimeFigureOut">
               <a:rPr lang="zh-SG" altLang="en-US" smtClean="0"/>
-              <a:t>2026/07/11</a:t>
+              <a:t>2026/07/12</a:t>
             </a:fld>
             <a:endParaRPr lang="zh-SG" altLang="en-US"/>
           </a:p>
@@ -2696,7 +2707,7 @@
           <a:p>
             <a:fld id="{F77C1FC0-184B-423F-A6A0-E4853DE7D68D}" type="datetimeFigureOut">
               <a:rPr lang="zh-SG" altLang="en-US" smtClean="0"/>
-              <a:t>2026/07/11</a:t>
+              <a:t>2026/07/12</a:t>
             </a:fld>
             <a:endParaRPr lang="zh-SG" altLang="en-US"/>
           </a:p>
@@ -2939,7 +2950,7 @@
           <a:p>
             <a:fld id="{F77C1FC0-184B-423F-A6A0-E4853DE7D68D}" type="datetimeFigureOut">
               <a:rPr lang="zh-SG" altLang="en-US" smtClean="0"/>
-              <a:t>2026/07/11</a:t>
+              <a:t>2026/07/12</a:t>
             </a:fld>
             <a:endParaRPr lang="zh-SG" altLang="en-US"/>
           </a:p>
@@ -3492,6 +3503,2097 @@
       </p:grpSpPr>
       <p:pic>
         <p:nvPicPr>
+          <p:cNvPr id="5" name="图片 4">
+            <a:extLst>
+              <a:ext uri="{FF2B5EF4-FFF2-40B4-BE49-F238E27FC236}">
+                <a16:creationId xmlns:a16="http://schemas.microsoft.com/office/drawing/2014/main" id="{A50FCF2A-8F17-B4F8-EE4E-374764E719A5}"/>
+              </a:ext>
+            </a:extLst>
+          </p:cNvPr>
+          <p:cNvPicPr>
+            <a:picLocks noChangeAspect="1"/>
+          </p:cNvPicPr>
+          <p:nvPr/>
+        </p:nvPicPr>
+        <p:blipFill>
+          <a:blip r:embed="rId2"/>
+          <a:stretch>
+            <a:fillRect/>
+          </a:stretch>
+        </p:blipFill>
+        <p:spPr>
+          <a:xfrm>
+            <a:off x="9718158" y="2754611"/>
+            <a:ext cx="2473842" cy="4103389"/>
+          </a:xfrm>
+          <a:prstGeom prst="rect">
+            <a:avLst/>
+          </a:prstGeom>
+        </p:spPr>
+      </p:pic>
+      <p:sp>
+        <p:nvSpPr>
+          <p:cNvPr id="2" name="标题 1">
+            <a:extLst>
+              <a:ext uri="{FF2B5EF4-FFF2-40B4-BE49-F238E27FC236}">
+                <a16:creationId xmlns:a16="http://schemas.microsoft.com/office/drawing/2014/main" id="{1F1421E8-4C90-A6BE-4CA7-930A9D8FB465}"/>
+              </a:ext>
+            </a:extLst>
+          </p:cNvPr>
+          <p:cNvSpPr>
+            <a:spLocks noGrp="1"/>
+          </p:cNvSpPr>
+          <p:nvPr>
+            <p:ph type="title"/>
+          </p:nvPr>
+        </p:nvSpPr>
+        <p:spPr/>
+        <p:txBody>
+          <a:bodyPr/>
+          <a:lstStyle/>
+          <a:p>
+            <a:r>
+              <a:rPr lang="zh-CN" altLang="en-US" dirty="0"/>
+              <a:t>避免读写竞态</a:t>
+            </a:r>
+            <a:endParaRPr lang="zh-SG" altLang="en-US" dirty="0"/>
+          </a:p>
+        </p:txBody>
+      </p:sp>
+      <p:sp>
+        <p:nvSpPr>
+          <p:cNvPr id="3" name="内容占位符 2">
+            <a:extLst>
+              <a:ext uri="{FF2B5EF4-FFF2-40B4-BE49-F238E27FC236}">
+                <a16:creationId xmlns:a16="http://schemas.microsoft.com/office/drawing/2014/main" id="{E2B725EB-B368-50A1-181A-AC349703A2F5}"/>
+              </a:ext>
+            </a:extLst>
+          </p:cNvPr>
+          <p:cNvSpPr>
+            <a:spLocks noGrp="1"/>
+          </p:cNvSpPr>
+          <p:nvPr>
+            <p:ph idx="1"/>
+          </p:nvPr>
+        </p:nvSpPr>
+        <p:spPr>
+          <a:xfrm>
+            <a:off x="0" y="1690688"/>
+            <a:ext cx="10515600" cy="4351338"/>
+          </a:xfrm>
+        </p:spPr>
+        <p:txBody>
+          <a:bodyPr>
+            <a:normAutofit/>
+          </a:bodyPr>
+          <a:lstStyle/>
+          <a:p>
+            <a:pPr marL="0" indent="0">
+              <a:buNone/>
+            </a:pPr>
+            <a:r>
+              <a:rPr lang="zh-CN" altLang="en-US" b="0" i="0" dirty="0">
+                <a:solidFill>
+                  <a:srgbClr val="222222"/>
+                </a:solidFill>
+                <a:effectLst/>
+                <a:latin typeface="??"/>
+              </a:rPr>
+              <a:t>如果</a:t>
+            </a:r>
+            <a:r>
+              <a:rPr lang="en-US" altLang="zh-CN" b="0" i="0" dirty="0">
+                <a:solidFill>
+                  <a:srgbClr val="222222"/>
+                </a:solidFill>
+                <a:effectLst/>
+                <a:latin typeface="??"/>
+              </a:rPr>
+              <a:t>DMA</a:t>
+            </a:r>
+            <a:r>
+              <a:rPr lang="zh-CN" altLang="en-US" b="0" i="0" dirty="0">
+                <a:solidFill>
+                  <a:srgbClr val="222222"/>
+                </a:solidFill>
+                <a:effectLst/>
+                <a:latin typeface="??"/>
+              </a:rPr>
+              <a:t>正在更新某块区域，而</a:t>
+            </a:r>
+            <a:r>
+              <a:rPr lang="en-US" altLang="zh-CN" b="0" i="0" dirty="0">
+                <a:solidFill>
+                  <a:srgbClr val="222222"/>
+                </a:solidFill>
+                <a:effectLst/>
+                <a:latin typeface="??"/>
+              </a:rPr>
+              <a:t>CPU</a:t>
+            </a:r>
+            <a:r>
+              <a:rPr lang="zh-CN" altLang="en-US" b="0" i="0" dirty="0">
+                <a:solidFill>
+                  <a:srgbClr val="222222"/>
+                </a:solidFill>
+                <a:effectLst/>
+                <a:latin typeface="??"/>
+              </a:rPr>
+              <a:t>正好读取它，就会导致错误</a:t>
+            </a:r>
+            <a:endParaRPr lang="en-US" altLang="zh-CN" b="0" i="0" dirty="0">
+              <a:solidFill>
+                <a:srgbClr val="222222"/>
+              </a:solidFill>
+              <a:effectLst/>
+              <a:latin typeface="??"/>
+            </a:endParaRPr>
+          </a:p>
+          <a:p>
+            <a:pPr marL="0" indent="0">
+              <a:buNone/>
+            </a:pPr>
+            <a:r>
+              <a:rPr lang="zh-CN" altLang="en-US" b="0" i="0" dirty="0">
+                <a:solidFill>
+                  <a:srgbClr val="222222"/>
+                </a:solidFill>
+                <a:effectLst/>
+                <a:latin typeface="??"/>
+              </a:rPr>
+              <a:t>为了避免读写竞态，一个内存区域在任意时刻只能有一个所有者</a:t>
+            </a:r>
+            <a:endParaRPr lang="en-US" altLang="zh-CN" b="0" i="0" dirty="0">
+              <a:solidFill>
+                <a:srgbClr val="222222"/>
+              </a:solidFill>
+              <a:effectLst/>
+              <a:latin typeface="??"/>
+            </a:endParaRPr>
+          </a:p>
+          <a:p>
+            <a:r>
+              <a:rPr lang="en-US" altLang="zh-CN" dirty="0"/>
+              <a:t>DMA</a:t>
+            </a:r>
+            <a:r>
+              <a:rPr lang="zh-CN" altLang="en-US" dirty="0"/>
+              <a:t>拥有缓冲区时，</a:t>
+            </a:r>
+            <a:r>
+              <a:rPr lang="en-US" altLang="zh-CN" dirty="0"/>
+              <a:t>CPU</a:t>
+            </a:r>
+            <a:r>
+              <a:rPr lang="zh-CN" altLang="en-US" dirty="0"/>
+              <a:t>不能修改</a:t>
+            </a:r>
+            <a:r>
+              <a:rPr lang="en-US" altLang="zh-CN" dirty="0"/>
+              <a:t>DMA</a:t>
+            </a:r>
+            <a:r>
+              <a:rPr lang="zh-CN" altLang="en-US" dirty="0"/>
+              <a:t>正在写入的区域</a:t>
+            </a:r>
+          </a:p>
+          <a:p>
+            <a:pPr>
+              <a:buFont typeface="Arial" panose="020B0604020202020204" pitchFamily="34" charset="0"/>
+              <a:buChar char="•"/>
+            </a:pPr>
+            <a:r>
+              <a:rPr lang="en-US" altLang="zh-CN" dirty="0"/>
+              <a:t>CPU</a:t>
+            </a:r>
+            <a:r>
+              <a:rPr lang="zh-CN" altLang="en-US" dirty="0"/>
+              <a:t>处理缓冲区时，</a:t>
+            </a:r>
+            <a:r>
+              <a:rPr lang="en-US" altLang="zh-CN" dirty="0"/>
+              <a:t>DMA</a:t>
+            </a:r>
+            <a:r>
+              <a:rPr lang="zh-CN" altLang="en-US" dirty="0"/>
+              <a:t>不能覆盖尚未处理的数据</a:t>
+            </a:r>
+            <a:endParaRPr lang="en-US" altLang="zh-CN" dirty="0"/>
+          </a:p>
+          <a:p>
+            <a:pPr marL="0" indent="0">
+              <a:buNone/>
+            </a:pPr>
+            <a:endParaRPr lang="en-US" altLang="zh-CN" dirty="0"/>
+          </a:p>
+          <a:p>
+            <a:pPr>
+              <a:buFont typeface="Arial" panose="020B0604020202020204" pitchFamily="34" charset="0"/>
+              <a:buChar char="•"/>
+            </a:pPr>
+            <a:r>
+              <a:rPr lang="zh-CN" altLang="en-US" dirty="0"/>
+              <a:t>可以通过控制读写指令顺序和原子读写从时间上隔离</a:t>
+            </a:r>
+            <a:endParaRPr lang="en-US" altLang="zh-CN" dirty="0"/>
+          </a:p>
+          <a:p>
+            <a:pPr>
+              <a:buFont typeface="Arial" panose="020B0604020202020204" pitchFamily="34" charset="0"/>
+              <a:buChar char="•"/>
+            </a:pPr>
+            <a:r>
+              <a:rPr lang="zh-CN" altLang="en-US" dirty="0"/>
+              <a:t>也可以通过双缓冲、环形缓冲等无锁数据结构从空间上隔离</a:t>
+            </a:r>
+            <a:endParaRPr lang="en-US" altLang="zh-CN" dirty="0"/>
+          </a:p>
+        </p:txBody>
+      </p:sp>
+    </p:spTree>
+    <p:extLst>
+      <p:ext uri="{BB962C8B-B14F-4D97-AF65-F5344CB8AC3E}">
+        <p14:creationId xmlns:p14="http://schemas.microsoft.com/office/powerpoint/2010/main" val="1317947932"/>
+      </p:ext>
+    </p:extLst>
+  </p:cSld>
+  <p:clrMapOvr>
+    <a:masterClrMapping/>
+  </p:clrMapOvr>
+</p:sld>
+</file>
+
+<file path=ppt/slides/slide11.xml><?xml version="1.0" encoding="utf-8"?>
+<p:sld xmlns:a="http://schemas.openxmlformats.org/drawingml/2006/main" xmlns:r="http://schemas.openxmlformats.org/officeDocument/2006/relationships" xmlns:p="http://schemas.openxmlformats.org/presentationml/2006/main">
+  <p:cSld>
+    <p:spTree>
+      <p:nvGrpSpPr>
+        <p:cNvPr id="1" name=""/>
+        <p:cNvGrpSpPr/>
+        <p:nvPr/>
+      </p:nvGrpSpPr>
+      <p:grpSpPr>
+        <a:xfrm>
+          <a:off x="0" y="0"/>
+          <a:ext cx="0" cy="0"/>
+          <a:chOff x="0" y="0"/>
+          <a:chExt cx="0" cy="0"/>
+        </a:xfrm>
+      </p:grpSpPr>
+      <p:sp>
+        <p:nvSpPr>
+          <p:cNvPr id="2" name="标题 1">
+            <a:extLst>
+              <a:ext uri="{FF2B5EF4-FFF2-40B4-BE49-F238E27FC236}">
+                <a16:creationId xmlns:a16="http://schemas.microsoft.com/office/drawing/2014/main" id="{C6CC914E-6340-1C64-FBC5-D50FD6DFC1FD}"/>
+              </a:ext>
+            </a:extLst>
+          </p:cNvPr>
+          <p:cNvSpPr>
+            <a:spLocks noGrp="1"/>
+          </p:cNvSpPr>
+          <p:nvPr>
+            <p:ph type="title"/>
+          </p:nvPr>
+        </p:nvSpPr>
+        <p:spPr/>
+        <p:txBody>
+          <a:bodyPr/>
+          <a:lstStyle/>
+          <a:p>
+            <a:r>
+              <a:rPr lang="zh-CN" altLang="en-US" dirty="0"/>
+              <a:t>生产者</a:t>
+            </a:r>
+            <a:r>
+              <a:rPr lang="en-US" altLang="zh-CN" dirty="0"/>
+              <a:t>/</a:t>
+            </a:r>
+            <a:r>
+              <a:rPr lang="zh-CN" altLang="en-US" dirty="0"/>
+              <a:t>消费者</a:t>
+            </a:r>
+            <a:endParaRPr lang="zh-SG" altLang="en-US" dirty="0"/>
+          </a:p>
+        </p:txBody>
+      </p:sp>
+      <p:sp>
+        <p:nvSpPr>
+          <p:cNvPr id="3" name="内容占位符 2">
+            <a:extLst>
+              <a:ext uri="{FF2B5EF4-FFF2-40B4-BE49-F238E27FC236}">
+                <a16:creationId xmlns:a16="http://schemas.microsoft.com/office/drawing/2014/main" id="{0EE81071-C495-0491-26AA-30861AF611AB}"/>
+              </a:ext>
+            </a:extLst>
+          </p:cNvPr>
+          <p:cNvSpPr>
+            <a:spLocks noGrp="1"/>
+          </p:cNvSpPr>
+          <p:nvPr>
+            <p:ph idx="1"/>
+          </p:nvPr>
+        </p:nvSpPr>
+        <p:spPr/>
+        <p:txBody>
+          <a:bodyPr/>
+          <a:lstStyle/>
+          <a:p>
+            <a:r>
+              <a:rPr lang="zh-CN" altLang="en-US" dirty="0"/>
+              <a:t>张三从串口接到数据，叫李四翻译翻译，然后告诉王五和赵六</a:t>
+            </a:r>
+            <a:endParaRPr lang="en-US" altLang="zh-CN" dirty="0"/>
+          </a:p>
+          <a:p>
+            <a:r>
+              <a:rPr lang="zh-CN" altLang="en-US" dirty="0"/>
+              <a:t>数据从张三到李四，我们管张三叫生产者，管李四叫消费者</a:t>
+            </a:r>
+            <a:endParaRPr lang="en-US" altLang="zh-CN" dirty="0"/>
+          </a:p>
+          <a:p>
+            <a:r>
+              <a:rPr lang="zh-CN" altLang="en-US" dirty="0"/>
+              <a:t>此时生产者和消费者各一个，称作单生产者</a:t>
+            </a:r>
+            <a:r>
+              <a:rPr lang="en-US" altLang="zh-CN" dirty="0"/>
+              <a:t>-</a:t>
+            </a:r>
+            <a:r>
+              <a:rPr lang="zh-CN" altLang="en-US" dirty="0"/>
+              <a:t>单消费者（</a:t>
+            </a:r>
+            <a:r>
+              <a:rPr lang="en-GB" altLang="zh-CN" dirty="0"/>
+              <a:t>Single Producer</a:t>
+            </a:r>
+            <a:r>
+              <a:rPr lang="en-US" altLang="zh-CN" dirty="0"/>
+              <a:t>/ </a:t>
+            </a:r>
+            <a:r>
+              <a:rPr lang="en-GB" altLang="zh-CN" dirty="0"/>
+              <a:t>Single Consumer</a:t>
+            </a:r>
+            <a:r>
+              <a:rPr lang="zh-CN" altLang="en-US" dirty="0"/>
+              <a:t>，简称</a:t>
+            </a:r>
+            <a:r>
+              <a:rPr lang="en-US" altLang="zh-CN" dirty="0"/>
+              <a:t>SPSC</a:t>
+            </a:r>
+            <a:r>
+              <a:rPr lang="zh-CN" altLang="en-US" dirty="0"/>
+              <a:t>）</a:t>
+            </a:r>
+            <a:endParaRPr lang="en-US" altLang="zh-CN" dirty="0"/>
+          </a:p>
+          <a:p>
+            <a:r>
+              <a:rPr lang="zh-CN" altLang="en-US" dirty="0"/>
+              <a:t>翻译后的信息从李四到王五和赵六，生产者仍然只有一个，但消费者有两个，这种情况叫单生产者</a:t>
+            </a:r>
+            <a:r>
+              <a:rPr lang="en-US" altLang="zh-CN" dirty="0"/>
+              <a:t>-</a:t>
+            </a:r>
+            <a:r>
+              <a:rPr lang="zh-CN" altLang="en-US" dirty="0"/>
+              <a:t>多消费者（</a:t>
+            </a:r>
+            <a:r>
+              <a:rPr lang="en-GB" altLang="zh-CN" dirty="0"/>
+              <a:t>Single Producer</a:t>
+            </a:r>
+            <a:r>
+              <a:rPr lang="en-US" altLang="zh-CN" dirty="0"/>
+              <a:t>/ Multi</a:t>
+            </a:r>
+            <a:r>
+              <a:rPr lang="en-GB" altLang="zh-CN" dirty="0"/>
+              <a:t> Consumer</a:t>
+            </a:r>
+            <a:r>
+              <a:rPr lang="zh-CN" altLang="en-US" dirty="0"/>
+              <a:t>，简称</a:t>
+            </a:r>
+            <a:r>
+              <a:rPr lang="en-US" altLang="zh-CN" dirty="0"/>
+              <a:t>SPMC</a:t>
+            </a:r>
+            <a:r>
+              <a:rPr lang="zh-CN" altLang="en-US" dirty="0"/>
+              <a:t>）</a:t>
+            </a:r>
+          </a:p>
+          <a:p>
+            <a:r>
+              <a:rPr lang="zh-CN" altLang="en-US" dirty="0"/>
+              <a:t>单生产者比较常见，处理逻辑也相对简单</a:t>
+            </a:r>
+            <a:endParaRPr lang="en-US" altLang="zh-CN" dirty="0"/>
+          </a:p>
+          <a:p>
+            <a:r>
+              <a:rPr lang="zh-CN" altLang="en-US" dirty="0"/>
+              <a:t>多生产者可以拆成多个单生产者再融合</a:t>
+            </a:r>
+            <a:endParaRPr lang="en-US" altLang="zh-CN" dirty="0"/>
+          </a:p>
+        </p:txBody>
+      </p:sp>
+    </p:spTree>
+    <p:extLst>
+      <p:ext uri="{BB962C8B-B14F-4D97-AF65-F5344CB8AC3E}">
+        <p14:creationId xmlns:p14="http://schemas.microsoft.com/office/powerpoint/2010/main" val="2906882623"/>
+      </p:ext>
+    </p:extLst>
+  </p:cSld>
+  <p:clrMapOvr>
+    <a:masterClrMapping/>
+  </p:clrMapOvr>
+</p:sld>
+</file>
+
+<file path=ppt/slides/slide12.xml><?xml version="1.0" encoding="utf-8"?>
+<p:sld xmlns:a="http://schemas.openxmlformats.org/drawingml/2006/main" xmlns:r="http://schemas.openxmlformats.org/officeDocument/2006/relationships" xmlns:p="http://schemas.openxmlformats.org/presentationml/2006/main">
+  <p:cSld>
+    <p:spTree>
+      <p:nvGrpSpPr>
+        <p:cNvPr id="1" name=""/>
+        <p:cNvGrpSpPr/>
+        <p:nvPr/>
+      </p:nvGrpSpPr>
+      <p:grpSpPr>
+        <a:xfrm>
+          <a:off x="0" y="0"/>
+          <a:ext cx="0" cy="0"/>
+          <a:chOff x="0" y="0"/>
+          <a:chExt cx="0" cy="0"/>
+        </a:xfrm>
+      </p:grpSpPr>
+      <p:sp>
+        <p:nvSpPr>
+          <p:cNvPr id="2" name="标题 1">
+            <a:extLst>
+              <a:ext uri="{FF2B5EF4-FFF2-40B4-BE49-F238E27FC236}">
+                <a16:creationId xmlns:a16="http://schemas.microsoft.com/office/drawing/2014/main" id="{10AC05FD-1C9D-409A-088C-EBBAA118F80C}"/>
+              </a:ext>
+            </a:extLst>
+          </p:cNvPr>
+          <p:cNvSpPr>
+            <a:spLocks noGrp="1"/>
+          </p:cNvSpPr>
+          <p:nvPr>
+            <p:ph type="title"/>
+          </p:nvPr>
+        </p:nvSpPr>
+        <p:spPr/>
+        <p:txBody>
+          <a:bodyPr/>
+          <a:lstStyle/>
+          <a:p>
+            <a:r>
+              <a:rPr lang="zh-CN" altLang="en-US" dirty="0"/>
+              <a:t>区分四种模型</a:t>
+            </a:r>
+            <a:endParaRPr lang="zh-SG" altLang="en-US" dirty="0"/>
+          </a:p>
+        </p:txBody>
+      </p:sp>
+      <p:graphicFrame>
+        <p:nvGraphicFramePr>
+          <p:cNvPr id="5" name="内容占位符 4">
+            <a:extLst>
+              <a:ext uri="{FF2B5EF4-FFF2-40B4-BE49-F238E27FC236}">
+                <a16:creationId xmlns:a16="http://schemas.microsoft.com/office/drawing/2014/main" id="{C71F1E9E-1A25-4FBD-4476-98AB93FF29D9}"/>
+              </a:ext>
+            </a:extLst>
+          </p:cNvPr>
+          <p:cNvGraphicFramePr>
+            <a:graphicFrameLocks noGrp="1"/>
+          </p:cNvGraphicFramePr>
+          <p:nvPr>
+            <p:ph idx="1"/>
+            <p:extLst>
+              <p:ext uri="{D42A27DB-BD31-4B8C-83A1-F6EECF244321}">
+                <p14:modId xmlns:p14="http://schemas.microsoft.com/office/powerpoint/2010/main" val="1164965696"/>
+              </p:ext>
+            </p:extLst>
+          </p:nvPr>
+        </p:nvGraphicFramePr>
+        <p:xfrm>
+          <a:off x="838200" y="1825625"/>
+          <a:ext cx="10515597" cy="2392680"/>
+        </p:xfrm>
+        <a:graphic>
+          <a:graphicData uri="http://schemas.openxmlformats.org/drawingml/2006/table">
+            <a:tbl>
+              <a:tblPr firstRow="1" bandRow="1">
+                <a:tableStyleId>{5C22544A-7EE6-4342-B048-85BDC9FD1C3A}</a:tableStyleId>
+              </a:tblPr>
+              <a:tblGrid>
+                <a:gridCol w="3505199">
+                  <a:extLst>
+                    <a:ext uri="{9D8B030D-6E8A-4147-A177-3AD203B41FA5}">
+                      <a16:colId xmlns:a16="http://schemas.microsoft.com/office/drawing/2014/main" val="351044057"/>
+                    </a:ext>
+                  </a:extLst>
+                </a:gridCol>
+                <a:gridCol w="3505199">
+                  <a:extLst>
+                    <a:ext uri="{9D8B030D-6E8A-4147-A177-3AD203B41FA5}">
+                      <a16:colId xmlns:a16="http://schemas.microsoft.com/office/drawing/2014/main" val="3601959543"/>
+                    </a:ext>
+                  </a:extLst>
+                </a:gridCol>
+                <a:gridCol w="3505199">
+                  <a:extLst>
+                    <a:ext uri="{9D8B030D-6E8A-4147-A177-3AD203B41FA5}">
+                      <a16:colId xmlns:a16="http://schemas.microsoft.com/office/drawing/2014/main" val="4256663365"/>
+                    </a:ext>
+                  </a:extLst>
+                </a:gridCol>
+              </a:tblGrid>
+              <a:tr h="370840">
+                <a:tc>
+                  <a:txBody>
+                    <a:bodyPr/>
+                    <a:lstStyle/>
+                    <a:p>
+                      <a:pPr algn="ctr"/>
+                      <a:r>
+                        <a:rPr lang="zh-SG" altLang="en-US" dirty="0"/>
+                        <a:t>模型</a:t>
+                      </a:r>
+                    </a:p>
+                  </a:txBody>
+                  <a:tcPr anchor="ctr"/>
+                </a:tc>
+                <a:tc>
+                  <a:txBody>
+                    <a:bodyPr/>
+                    <a:lstStyle/>
+                    <a:p>
+                      <a:pPr algn="ctr"/>
+                      <a:r>
+                        <a:rPr lang="zh-SG" altLang="en-US"/>
+                        <a:t>含义</a:t>
+                      </a:r>
+                    </a:p>
+                  </a:txBody>
+                  <a:tcPr anchor="ctr"/>
+                </a:tc>
+                <a:tc>
+                  <a:txBody>
+                    <a:bodyPr/>
+                    <a:lstStyle/>
+                    <a:p>
+                      <a:pPr algn="ctr"/>
+                      <a:r>
+                        <a:rPr lang="zh-SG" altLang="en-US" dirty="0"/>
+                        <a:t>例子</a:t>
+                      </a:r>
+                    </a:p>
+                  </a:txBody>
+                  <a:tcPr anchor="ctr"/>
+                </a:tc>
+                <a:extLst>
+                  <a:ext uri="{0D108BD9-81ED-4DB2-BD59-A6C34878D82A}">
+                    <a16:rowId xmlns:a16="http://schemas.microsoft.com/office/drawing/2014/main" val="3562924134"/>
+                  </a:ext>
+                </a:extLst>
+              </a:tr>
+              <a:tr h="370840">
+                <a:tc>
+                  <a:txBody>
+                    <a:bodyPr/>
+                    <a:lstStyle/>
+                    <a:p>
+                      <a:pPr algn="ctr"/>
+                      <a:r>
+                        <a:rPr lang="en-GB" dirty="0"/>
+                        <a:t>SPSC</a:t>
+                      </a:r>
+                    </a:p>
+                  </a:txBody>
+                  <a:tcPr anchor="ctr"/>
+                </a:tc>
+                <a:tc>
+                  <a:txBody>
+                    <a:bodyPr/>
+                    <a:lstStyle/>
+                    <a:p>
+                      <a:pPr algn="ctr"/>
+                      <a:r>
+                        <a:rPr lang="zh-CN" altLang="en-US"/>
+                        <a:t>单生产者、单消费者</a:t>
+                      </a:r>
+                    </a:p>
+                  </a:txBody>
+                  <a:tcPr anchor="ctr"/>
+                </a:tc>
+                <a:tc>
+                  <a:txBody>
+                    <a:bodyPr/>
+                    <a:lstStyle/>
+                    <a:p>
+                      <a:pPr algn="ctr"/>
+                      <a:r>
+                        <a:rPr lang="en-US" altLang="zh-CN" dirty="0"/>
+                        <a:t>UART</a:t>
+                      </a:r>
+                      <a:r>
+                        <a:rPr lang="zh-CN" altLang="en-US" dirty="0"/>
+                        <a:t>解析任务到模式仲裁任务</a:t>
+                      </a:r>
+                    </a:p>
+                  </a:txBody>
+                  <a:tcPr anchor="ctr"/>
+                </a:tc>
+                <a:extLst>
+                  <a:ext uri="{0D108BD9-81ED-4DB2-BD59-A6C34878D82A}">
+                    <a16:rowId xmlns:a16="http://schemas.microsoft.com/office/drawing/2014/main" val="2161646763"/>
+                  </a:ext>
+                </a:extLst>
+              </a:tr>
+              <a:tr h="370840">
+                <a:tc>
+                  <a:txBody>
+                    <a:bodyPr/>
+                    <a:lstStyle/>
+                    <a:p>
+                      <a:pPr algn="ctr"/>
+                      <a:r>
+                        <a:rPr lang="en-GB"/>
+                        <a:t>SPMC</a:t>
+                      </a:r>
+                    </a:p>
+                  </a:txBody>
+                  <a:tcPr anchor="ctr"/>
+                </a:tc>
+                <a:tc>
+                  <a:txBody>
+                    <a:bodyPr/>
+                    <a:lstStyle/>
+                    <a:p>
+                      <a:pPr algn="ctr"/>
+                      <a:r>
+                        <a:rPr lang="zh-CN" altLang="en-US" dirty="0"/>
+                        <a:t>单生产者、多消费者</a:t>
+                      </a:r>
+                    </a:p>
+                  </a:txBody>
+                  <a:tcPr anchor="ctr"/>
+                </a:tc>
+                <a:tc>
+                  <a:txBody>
+                    <a:bodyPr/>
+                    <a:lstStyle/>
+                    <a:p>
+                      <a:pPr algn="ctr"/>
+                      <a:r>
+                        <a:rPr lang="zh-CN" altLang="en-US" dirty="0"/>
+                        <a:t>仲裁任务向底盘、云台、机械臂发布统一命令</a:t>
+                      </a:r>
+                    </a:p>
+                  </a:txBody>
+                  <a:tcPr anchor="ctr"/>
+                </a:tc>
+                <a:extLst>
+                  <a:ext uri="{0D108BD9-81ED-4DB2-BD59-A6C34878D82A}">
+                    <a16:rowId xmlns:a16="http://schemas.microsoft.com/office/drawing/2014/main" val="671260387"/>
+                  </a:ext>
+                </a:extLst>
+              </a:tr>
+              <a:tr h="370840">
+                <a:tc>
+                  <a:txBody>
+                    <a:bodyPr/>
+                    <a:lstStyle/>
+                    <a:p>
+                      <a:pPr algn="ctr"/>
+                      <a:r>
+                        <a:rPr lang="en-GB"/>
+                        <a:t>MPSC</a:t>
+                      </a:r>
+                    </a:p>
+                  </a:txBody>
+                  <a:tcPr anchor="ctr"/>
+                </a:tc>
+                <a:tc>
+                  <a:txBody>
+                    <a:bodyPr/>
+                    <a:lstStyle/>
+                    <a:p>
+                      <a:pPr algn="ctr"/>
+                      <a:r>
+                        <a:rPr lang="zh-CN" altLang="en-US" dirty="0"/>
+                        <a:t>多生产者、单消费者</a:t>
+                      </a:r>
+                    </a:p>
+                  </a:txBody>
+                  <a:tcPr anchor="ctr"/>
+                </a:tc>
+                <a:tc>
+                  <a:txBody>
+                    <a:bodyPr/>
+                    <a:lstStyle/>
+                    <a:p>
+                      <a:pPr algn="ctr"/>
+                      <a:r>
+                        <a:rPr lang="zh-CN" altLang="en-US" dirty="0"/>
+                        <a:t>多个模块向日志任务或故障管理任务发送消息</a:t>
+                      </a:r>
+                    </a:p>
+                  </a:txBody>
+                  <a:tcPr anchor="ctr"/>
+                </a:tc>
+                <a:extLst>
+                  <a:ext uri="{0D108BD9-81ED-4DB2-BD59-A6C34878D82A}">
+                    <a16:rowId xmlns:a16="http://schemas.microsoft.com/office/drawing/2014/main" val="1561906679"/>
+                  </a:ext>
+                </a:extLst>
+              </a:tr>
+              <a:tr h="370840">
+                <a:tc>
+                  <a:txBody>
+                    <a:bodyPr/>
+                    <a:lstStyle/>
+                    <a:p>
+                      <a:pPr algn="ctr"/>
+                      <a:r>
+                        <a:rPr lang="en-GB" dirty="0"/>
+                        <a:t>MPMC</a:t>
+                      </a:r>
+                    </a:p>
+                  </a:txBody>
+                  <a:tcPr anchor="ctr"/>
+                </a:tc>
+                <a:tc>
+                  <a:txBody>
+                    <a:bodyPr/>
+                    <a:lstStyle/>
+                    <a:p>
+                      <a:pPr algn="ctr"/>
+                      <a:r>
+                        <a:rPr lang="zh-CN" altLang="en-US"/>
+                        <a:t>多生产者、多消费者</a:t>
+                      </a:r>
+                    </a:p>
+                  </a:txBody>
+                  <a:tcPr anchor="ctr"/>
+                </a:tc>
+                <a:tc>
+                  <a:txBody>
+                    <a:bodyPr/>
+                    <a:lstStyle/>
+                    <a:p>
+                      <a:pPr algn="ctr"/>
+                      <a:r>
+                        <a:rPr lang="zh-CN" altLang="en-US" dirty="0"/>
+                        <a:t>不太常见</a:t>
+                      </a:r>
+                    </a:p>
+                  </a:txBody>
+                  <a:tcPr anchor="ctr"/>
+                </a:tc>
+                <a:extLst>
+                  <a:ext uri="{0D108BD9-81ED-4DB2-BD59-A6C34878D82A}">
+                    <a16:rowId xmlns:a16="http://schemas.microsoft.com/office/drawing/2014/main" val="2610813476"/>
+                  </a:ext>
+                </a:extLst>
+              </a:tr>
+            </a:tbl>
+          </a:graphicData>
+        </a:graphic>
+      </p:graphicFrame>
+      <p:sp>
+        <p:nvSpPr>
+          <p:cNvPr id="10" name="文本框 9">
+            <a:extLst>
+              <a:ext uri="{FF2B5EF4-FFF2-40B4-BE49-F238E27FC236}">
+                <a16:creationId xmlns:a16="http://schemas.microsoft.com/office/drawing/2014/main" id="{04C5E2ED-3FD6-80D5-1D26-8BA987C50761}"/>
+              </a:ext>
+            </a:extLst>
+          </p:cNvPr>
+          <p:cNvSpPr txBox="1"/>
+          <p:nvPr/>
+        </p:nvSpPr>
+        <p:spPr>
+          <a:xfrm>
+            <a:off x="1364509" y="4759473"/>
+            <a:ext cx="9462977" cy="523220"/>
+          </a:xfrm>
+          <a:prstGeom prst="rect">
+            <a:avLst/>
+          </a:prstGeom>
+          <a:noFill/>
+        </p:spPr>
+        <p:txBody>
+          <a:bodyPr wrap="square">
+            <a:spAutoFit/>
+          </a:bodyPr>
+          <a:lstStyle/>
+          <a:p>
+            <a:pPr marL="0" lvl="1"/>
+            <a:r>
+              <a:rPr lang="zh-CN" altLang="en-US" sz="2800" dirty="0"/>
+              <a:t>注意区分：多个消费者是各自收到一份，还是竞争取走消息</a:t>
+            </a:r>
+          </a:p>
+        </p:txBody>
+      </p:sp>
+    </p:spTree>
+    <p:extLst>
+      <p:ext uri="{BB962C8B-B14F-4D97-AF65-F5344CB8AC3E}">
+        <p14:creationId xmlns:p14="http://schemas.microsoft.com/office/powerpoint/2010/main" val="3337871545"/>
+      </p:ext>
+    </p:extLst>
+  </p:cSld>
+  <p:clrMapOvr>
+    <a:masterClrMapping/>
+  </p:clrMapOvr>
+</p:sld>
+</file>
+
+<file path=ppt/slides/slide13.xml><?xml version="1.0" encoding="utf-8"?>
+<p:sld xmlns:a="http://schemas.openxmlformats.org/drawingml/2006/main" xmlns:r="http://schemas.openxmlformats.org/officeDocument/2006/relationships" xmlns:p="http://schemas.openxmlformats.org/presentationml/2006/main">
+  <p:cSld>
+    <p:spTree>
+      <p:nvGrpSpPr>
+        <p:cNvPr id="1" name=""/>
+        <p:cNvGrpSpPr/>
+        <p:nvPr/>
+      </p:nvGrpSpPr>
+      <p:grpSpPr>
+        <a:xfrm>
+          <a:off x="0" y="0"/>
+          <a:ext cx="0" cy="0"/>
+          <a:chOff x="0" y="0"/>
+          <a:chExt cx="0" cy="0"/>
+        </a:xfrm>
+      </p:grpSpPr>
+      <p:sp>
+        <p:nvSpPr>
+          <p:cNvPr id="2" name="标题 1">
+            <a:extLst>
+              <a:ext uri="{FF2B5EF4-FFF2-40B4-BE49-F238E27FC236}">
+                <a16:creationId xmlns:a16="http://schemas.microsoft.com/office/drawing/2014/main" id="{4BFFCD24-3F96-4CCF-FF3A-7EF9A1D8892D}"/>
+              </a:ext>
+            </a:extLst>
+          </p:cNvPr>
+          <p:cNvSpPr>
+            <a:spLocks noGrp="1"/>
+          </p:cNvSpPr>
+          <p:nvPr>
+            <p:ph type="title"/>
+          </p:nvPr>
+        </p:nvSpPr>
+        <p:spPr/>
+        <p:txBody>
+          <a:bodyPr/>
+          <a:lstStyle/>
+          <a:p>
+            <a:r>
+              <a:rPr lang="zh-CN" altLang="en-US" dirty="0"/>
+              <a:t>确保单次读写不被打断</a:t>
+            </a:r>
+            <a:endParaRPr lang="zh-SG" altLang="en-US" dirty="0"/>
+          </a:p>
+        </p:txBody>
+      </p:sp>
+      <p:sp>
+        <p:nvSpPr>
+          <p:cNvPr id="3" name="内容占位符 2">
+            <a:extLst>
+              <a:ext uri="{FF2B5EF4-FFF2-40B4-BE49-F238E27FC236}">
+                <a16:creationId xmlns:a16="http://schemas.microsoft.com/office/drawing/2014/main" id="{11A2F1D5-6C0B-63F6-FC7B-31172E180ADD}"/>
+              </a:ext>
+            </a:extLst>
+          </p:cNvPr>
+          <p:cNvSpPr>
+            <a:spLocks noGrp="1"/>
+          </p:cNvSpPr>
+          <p:nvPr>
+            <p:ph idx="1"/>
+          </p:nvPr>
+        </p:nvSpPr>
+        <p:spPr>
+          <a:xfrm>
+            <a:off x="838200" y="1825624"/>
+            <a:ext cx="10515600" cy="5032375"/>
+          </a:xfrm>
+        </p:spPr>
+        <p:txBody>
+          <a:bodyPr>
+            <a:normAutofit/>
+          </a:bodyPr>
+          <a:lstStyle/>
+          <a:p>
+            <a:pPr>
+              <a:defRPr/>
+            </a:pPr>
+            <a:r>
+              <a:rPr lang="zh-SG" altLang="en-US" dirty="0"/>
+              <a:t>原子变量</a:t>
+            </a:r>
+            <a:endParaRPr lang="en-US" altLang="zh-SG" dirty="0"/>
+          </a:p>
+          <a:p>
+            <a:pPr lvl="1">
+              <a:defRPr/>
+            </a:pPr>
+            <a:r>
+              <a:rPr lang="en-US" altLang="zh-CN" dirty="0"/>
+              <a:t>C++11</a:t>
+            </a:r>
+            <a:r>
+              <a:rPr lang="zh-CN" altLang="en-US" dirty="0"/>
+              <a:t>内置，底层通过关中断、自旋锁等方式实现不被打断的读写</a:t>
+            </a:r>
+            <a:endParaRPr lang="en-US" altLang="zh-CN" dirty="0"/>
+          </a:p>
+          <a:p>
+            <a:pPr lvl="1">
+              <a:defRPr/>
+            </a:pPr>
+            <a:r>
+              <a:rPr lang="zh-CN" altLang="en-US" dirty="0"/>
+              <a:t>较小的类型可能属于无锁原子类型，不需要锁即可实现读写的原子性</a:t>
+            </a:r>
+            <a:endParaRPr lang="en-US" altLang="zh-CN" dirty="0"/>
+          </a:p>
+          <a:p>
+            <a:pPr lvl="1">
+              <a:defRPr/>
+            </a:pPr>
+            <a:r>
+              <a:rPr lang="zh-CN" altLang="en-US" dirty="0"/>
+              <a:t>注意：多个原子变量组成结构体，该结构体整体是非原子的</a:t>
+            </a:r>
+            <a:endParaRPr lang="en-US" altLang="zh-CN" dirty="0"/>
+          </a:p>
+          <a:p>
+            <a:r>
+              <a:rPr lang="zh-CN" altLang="en-US" dirty="0"/>
+              <a:t>互斥锁</a:t>
+            </a:r>
+            <a:endParaRPr lang="en-US" altLang="zh-CN" dirty="0"/>
+          </a:p>
+          <a:p>
+            <a:pPr lvl="1"/>
+            <a:r>
+              <a:rPr lang="zh-CN" altLang="en-US" dirty="0"/>
+              <a:t>防止特定任务抢占</a:t>
+            </a:r>
+            <a:endParaRPr lang="en-US" altLang="zh-CN" dirty="0"/>
+          </a:p>
+          <a:p>
+            <a:pPr lvl="1"/>
+            <a:r>
+              <a:rPr lang="zh-CN" altLang="en-US" dirty="0"/>
+              <a:t>注意：</a:t>
+            </a:r>
+            <a:endParaRPr lang="en-US" altLang="zh-CN" dirty="0"/>
+          </a:p>
+          <a:p>
+            <a:pPr lvl="2"/>
+            <a:r>
+              <a:rPr lang="zh-CN" altLang="en-US" dirty="0"/>
+              <a:t>避免优先级反转</a:t>
+            </a:r>
+            <a:endParaRPr lang="en-US" altLang="zh-CN" dirty="0"/>
+          </a:p>
+          <a:p>
+            <a:pPr lvl="2"/>
+            <a:r>
+              <a:rPr lang="zh-CN" altLang="en-US" dirty="0"/>
+              <a:t>不要在中断中使用互斥锁</a:t>
+            </a:r>
+            <a:endParaRPr lang="en-US" altLang="zh-CN" dirty="0"/>
+          </a:p>
+          <a:p>
+            <a:r>
+              <a:rPr lang="zh-CN" altLang="en-US" dirty="0"/>
+              <a:t>临界区</a:t>
+            </a:r>
+            <a:endParaRPr lang="en-US" altLang="zh-CN" dirty="0"/>
+          </a:p>
+          <a:p>
+            <a:pPr lvl="1"/>
+            <a:r>
+              <a:rPr lang="zh-CN" altLang="en-US" dirty="0"/>
+              <a:t>通过短时间禁止特定调度或中断抢占，保护读写不被打断</a:t>
+            </a:r>
+            <a:endParaRPr lang="en-US" altLang="zh-CN" dirty="0"/>
+          </a:p>
+          <a:p>
+            <a:pPr lvl="1"/>
+            <a:r>
+              <a:rPr lang="zh-CN" altLang="en-US" dirty="0"/>
+              <a:t>临界区应当尽量短，需要确保最坏情况下的执行时间依然有限</a:t>
+            </a:r>
+            <a:endParaRPr lang="en-US" altLang="zh-CN" dirty="0"/>
+          </a:p>
+        </p:txBody>
+      </p:sp>
+    </p:spTree>
+    <p:extLst>
+      <p:ext uri="{BB962C8B-B14F-4D97-AF65-F5344CB8AC3E}">
+        <p14:creationId xmlns:p14="http://schemas.microsoft.com/office/powerpoint/2010/main" val="1493939683"/>
+      </p:ext>
+    </p:extLst>
+  </p:cSld>
+  <p:clrMapOvr>
+    <a:masterClrMapping/>
+  </p:clrMapOvr>
+</p:sld>
+</file>
+
+<file path=ppt/slides/slide14.xml><?xml version="1.0" encoding="utf-8"?>
+<p:sld xmlns:a="http://schemas.openxmlformats.org/drawingml/2006/main" xmlns:r="http://schemas.openxmlformats.org/officeDocument/2006/relationships" xmlns:p="http://schemas.openxmlformats.org/presentationml/2006/main">
+  <p:cSld>
+    <p:spTree>
+      <p:nvGrpSpPr>
+        <p:cNvPr id="1" name=""/>
+        <p:cNvGrpSpPr/>
+        <p:nvPr/>
+      </p:nvGrpSpPr>
+      <p:grpSpPr>
+        <a:xfrm>
+          <a:off x="0" y="0"/>
+          <a:ext cx="0" cy="0"/>
+          <a:chOff x="0" y="0"/>
+          <a:chExt cx="0" cy="0"/>
+        </a:xfrm>
+      </p:grpSpPr>
+      <p:sp>
+        <p:nvSpPr>
+          <p:cNvPr id="2" name="标题 1">
+            <a:extLst>
+              <a:ext uri="{FF2B5EF4-FFF2-40B4-BE49-F238E27FC236}">
+                <a16:creationId xmlns:a16="http://schemas.microsoft.com/office/drawing/2014/main" id="{D382DC60-2A48-0768-64F3-B4940A45D49E}"/>
+              </a:ext>
+            </a:extLst>
+          </p:cNvPr>
+          <p:cNvSpPr>
+            <a:spLocks noGrp="1"/>
+          </p:cNvSpPr>
+          <p:nvPr>
+            <p:ph type="title"/>
+          </p:nvPr>
+        </p:nvSpPr>
+        <p:spPr/>
+        <p:txBody>
+          <a:bodyPr/>
+          <a:lstStyle/>
+          <a:p>
+            <a:r>
+              <a:rPr lang="zh-CN" altLang="en-US" dirty="0"/>
+              <a:t>使用</a:t>
+            </a:r>
+            <a:r>
+              <a:rPr lang="zh-SG" altLang="en-US" dirty="0"/>
+              <a:t>无锁</a:t>
+            </a:r>
+            <a:r>
+              <a:rPr lang="zh-CN" altLang="en-US" dirty="0"/>
+              <a:t>数据结构避免竞态</a:t>
+            </a:r>
+            <a:endParaRPr lang="zh-SG" altLang="en-US" dirty="0"/>
+          </a:p>
+        </p:txBody>
+      </p:sp>
+      <p:sp>
+        <p:nvSpPr>
+          <p:cNvPr id="3" name="内容占位符 2">
+            <a:extLst>
+              <a:ext uri="{FF2B5EF4-FFF2-40B4-BE49-F238E27FC236}">
+                <a16:creationId xmlns:a16="http://schemas.microsoft.com/office/drawing/2014/main" id="{661FEEE4-B12A-3030-2D2A-DB916E313552}"/>
+              </a:ext>
+            </a:extLst>
+          </p:cNvPr>
+          <p:cNvSpPr>
+            <a:spLocks noGrp="1"/>
+          </p:cNvSpPr>
+          <p:nvPr>
+            <p:ph idx="1"/>
+          </p:nvPr>
+        </p:nvSpPr>
+        <p:spPr/>
+        <p:txBody>
+          <a:bodyPr/>
+          <a:lstStyle/>
+          <a:p>
+            <a:pPr marL="0" indent="0">
+              <a:buNone/>
+            </a:pPr>
+            <a:r>
+              <a:rPr lang="zh-CN" altLang="en-US" dirty="0"/>
+              <a:t>读写各占一部分区域，两个空间，互不干扰</a:t>
+            </a:r>
+            <a:endParaRPr lang="en-US" altLang="zh-CN" dirty="0"/>
+          </a:p>
+          <a:p>
+            <a:r>
+              <a:rPr lang="en-US" altLang="zh-CN" dirty="0"/>
+              <a:t>SPSC</a:t>
+            </a:r>
+            <a:r>
+              <a:rPr lang="zh-CN" altLang="en-US" dirty="0"/>
+              <a:t>场景可以使用相对简单的双缓冲、环形队列等</a:t>
+            </a:r>
+            <a:endParaRPr lang="en-US" altLang="zh-CN" dirty="0"/>
+          </a:p>
+          <a:p>
+            <a:r>
+              <a:rPr lang="zh-CN" altLang="en-US" dirty="0"/>
+              <a:t>对于多消费者情形，需要</a:t>
+            </a:r>
+            <a:r>
+              <a:rPr lang="en-US" altLang="zh-CN" dirty="0"/>
+              <a:t>CAS</a:t>
+            </a:r>
+            <a:r>
+              <a:rPr lang="zh-CN" altLang="en-US" dirty="0"/>
+              <a:t>等较复杂机制</a:t>
+            </a:r>
+            <a:endParaRPr lang="en-US" altLang="zh-CN" dirty="0"/>
+          </a:p>
+          <a:p>
+            <a:r>
+              <a:rPr lang="zh-CN" altLang="en-US" sz="2800" dirty="0"/>
+              <a:t>寻找简化机会：</a:t>
+            </a:r>
+            <a:endParaRPr lang="en-US" altLang="zh-CN" sz="2800" dirty="0"/>
+          </a:p>
+          <a:p>
+            <a:pPr marL="914400" lvl="1" indent="-457200"/>
+            <a:r>
+              <a:rPr lang="zh-CN" altLang="en-US" dirty="0"/>
+              <a:t>哪些字段只有一个写入者，能够被拆分</a:t>
+            </a:r>
+          </a:p>
+          <a:p>
+            <a:pPr marL="914400" lvl="1" indent="-457200"/>
+            <a:r>
+              <a:rPr lang="zh-CN" altLang="en-US" dirty="0"/>
+              <a:t>能否每个生产者一个</a:t>
+            </a:r>
+            <a:r>
+              <a:rPr lang="en-US" altLang="zh-CN" dirty="0"/>
+              <a:t>SPSC</a:t>
+            </a:r>
+            <a:r>
+              <a:rPr lang="zh-CN" altLang="en-US" dirty="0"/>
+              <a:t>队列，由同一个任务汇总并发布</a:t>
+            </a:r>
+          </a:p>
+          <a:p>
+            <a:endParaRPr lang="en-US" altLang="zh-CN" dirty="0"/>
+          </a:p>
+        </p:txBody>
+      </p:sp>
+      <p:pic>
+        <p:nvPicPr>
+          <p:cNvPr id="5" name="图片 4">
+            <a:extLst>
+              <a:ext uri="{FF2B5EF4-FFF2-40B4-BE49-F238E27FC236}">
+                <a16:creationId xmlns:a16="http://schemas.microsoft.com/office/drawing/2014/main" id="{1FE08310-2A97-B953-7134-DF09C1CA1E75}"/>
+              </a:ext>
+            </a:extLst>
+          </p:cNvPr>
+          <p:cNvPicPr>
+            <a:picLocks noChangeAspect="1"/>
+          </p:cNvPicPr>
+          <p:nvPr/>
+        </p:nvPicPr>
+        <p:blipFill>
+          <a:blip r:embed="rId2"/>
+          <a:stretch>
+            <a:fillRect/>
+          </a:stretch>
+        </p:blipFill>
+        <p:spPr>
+          <a:xfrm>
+            <a:off x="9682976" y="0"/>
+            <a:ext cx="2509024" cy="6858000"/>
+          </a:xfrm>
+          <a:prstGeom prst="rect">
+            <a:avLst/>
+          </a:prstGeom>
+        </p:spPr>
+      </p:pic>
+    </p:spTree>
+    <p:extLst>
+      <p:ext uri="{BB962C8B-B14F-4D97-AF65-F5344CB8AC3E}">
+        <p14:creationId xmlns:p14="http://schemas.microsoft.com/office/powerpoint/2010/main" val="952193526"/>
+      </p:ext>
+    </p:extLst>
+  </p:cSld>
+  <p:clrMapOvr>
+    <a:masterClrMapping/>
+  </p:clrMapOvr>
+</p:sld>
+</file>
+
+<file path=ppt/slides/slide15.xml><?xml version="1.0" encoding="utf-8"?>
+<p:sld xmlns:a="http://schemas.openxmlformats.org/drawingml/2006/main" xmlns:r="http://schemas.openxmlformats.org/officeDocument/2006/relationships" xmlns:p="http://schemas.openxmlformats.org/presentationml/2006/main">
+  <p:cSld>
+    <p:spTree>
+      <p:nvGrpSpPr>
+        <p:cNvPr id="1" name=""/>
+        <p:cNvGrpSpPr/>
+        <p:nvPr/>
+      </p:nvGrpSpPr>
+      <p:grpSpPr>
+        <a:xfrm>
+          <a:off x="0" y="0"/>
+          <a:ext cx="0" cy="0"/>
+          <a:chOff x="0" y="0"/>
+          <a:chExt cx="0" cy="0"/>
+        </a:xfrm>
+      </p:grpSpPr>
+      <p:sp>
+        <p:nvSpPr>
+          <p:cNvPr id="2" name="标题 1">
+            <a:extLst>
+              <a:ext uri="{FF2B5EF4-FFF2-40B4-BE49-F238E27FC236}">
+                <a16:creationId xmlns:a16="http://schemas.microsoft.com/office/drawing/2014/main" id="{6C9BF933-5781-055D-C8A7-CF61CBA9BFE8}"/>
+              </a:ext>
+            </a:extLst>
+          </p:cNvPr>
+          <p:cNvSpPr>
+            <a:spLocks noGrp="1"/>
+          </p:cNvSpPr>
+          <p:nvPr>
+            <p:ph type="title"/>
+          </p:nvPr>
+        </p:nvSpPr>
+        <p:spPr/>
+        <p:txBody>
+          <a:bodyPr/>
+          <a:lstStyle/>
+          <a:p>
+            <a:r>
+              <a:rPr lang="zh-CN" altLang="en-US" dirty="0"/>
+              <a:t>在</a:t>
+            </a:r>
+            <a:r>
+              <a:rPr lang="en-US" altLang="zh-CN" dirty="0"/>
+              <a:t>DMA</a:t>
+            </a:r>
+            <a:r>
+              <a:rPr lang="zh-CN" altLang="en-US" dirty="0"/>
+              <a:t>接收中选择单</a:t>
+            </a:r>
+            <a:r>
+              <a:rPr lang="en-US" altLang="zh-CN" dirty="0"/>
+              <a:t>/</a:t>
+            </a:r>
+            <a:r>
+              <a:rPr lang="zh-CN" altLang="en-US" dirty="0"/>
+              <a:t>双</a:t>
+            </a:r>
+            <a:r>
+              <a:rPr lang="en-US" altLang="zh-CN" dirty="0"/>
+              <a:t>/</a:t>
+            </a:r>
+            <a:r>
+              <a:rPr lang="zh-CN" altLang="en-US" dirty="0"/>
+              <a:t>环形缓冲</a:t>
+            </a:r>
+            <a:endParaRPr lang="zh-SG" altLang="en-US" dirty="0"/>
+          </a:p>
+        </p:txBody>
+      </p:sp>
+      <p:graphicFrame>
+        <p:nvGraphicFramePr>
+          <p:cNvPr id="5" name="内容占位符 4">
+            <a:extLst>
+              <a:ext uri="{FF2B5EF4-FFF2-40B4-BE49-F238E27FC236}">
+                <a16:creationId xmlns:a16="http://schemas.microsoft.com/office/drawing/2014/main" id="{06B5E3EC-51E6-A5DC-6B1D-9AECE9B2535D}"/>
+              </a:ext>
+            </a:extLst>
+          </p:cNvPr>
+          <p:cNvGraphicFramePr>
+            <a:graphicFrameLocks noGrp="1"/>
+          </p:cNvGraphicFramePr>
+          <p:nvPr>
+            <p:ph idx="1"/>
+            <p:extLst>
+              <p:ext uri="{D42A27DB-BD31-4B8C-83A1-F6EECF244321}">
+                <p14:modId xmlns:p14="http://schemas.microsoft.com/office/powerpoint/2010/main" val="2162764011"/>
+              </p:ext>
+            </p:extLst>
+          </p:nvPr>
+        </p:nvGraphicFramePr>
+        <p:xfrm>
+          <a:off x="838200" y="1825625"/>
+          <a:ext cx="10515600" cy="1752600"/>
+        </p:xfrm>
+        <a:graphic>
+          <a:graphicData uri="http://schemas.openxmlformats.org/drawingml/2006/table">
+            <a:tbl>
+              <a:tblPr firstRow="1" bandRow="1">
+                <a:tableStyleId>{5C22544A-7EE6-4342-B048-85BDC9FD1C3A}</a:tableStyleId>
+              </a:tblPr>
+              <a:tblGrid>
+                <a:gridCol w="3505200">
+                  <a:extLst>
+                    <a:ext uri="{9D8B030D-6E8A-4147-A177-3AD203B41FA5}">
+                      <a16:colId xmlns:a16="http://schemas.microsoft.com/office/drawing/2014/main" val="192393092"/>
+                    </a:ext>
+                  </a:extLst>
+                </a:gridCol>
+                <a:gridCol w="3505200">
+                  <a:extLst>
+                    <a:ext uri="{9D8B030D-6E8A-4147-A177-3AD203B41FA5}">
+                      <a16:colId xmlns:a16="http://schemas.microsoft.com/office/drawing/2014/main" val="4094848208"/>
+                    </a:ext>
+                  </a:extLst>
+                </a:gridCol>
+                <a:gridCol w="3505200">
+                  <a:extLst>
+                    <a:ext uri="{9D8B030D-6E8A-4147-A177-3AD203B41FA5}">
+                      <a16:colId xmlns:a16="http://schemas.microsoft.com/office/drawing/2014/main" val="4115269315"/>
+                    </a:ext>
+                  </a:extLst>
+                </a:gridCol>
+              </a:tblGrid>
+              <a:tr h="370840">
+                <a:tc>
+                  <a:txBody>
+                    <a:bodyPr/>
+                    <a:lstStyle/>
+                    <a:p>
+                      <a:pPr algn="ctr"/>
+                      <a:r>
+                        <a:rPr lang="zh-CN" altLang="en-US" dirty="0"/>
+                        <a:t>类型</a:t>
+                      </a:r>
+                      <a:endParaRPr lang="zh-SG" altLang="en-US" dirty="0"/>
+                    </a:p>
+                  </a:txBody>
+                  <a:tcPr anchor="ctr"/>
+                </a:tc>
+                <a:tc>
+                  <a:txBody>
+                    <a:bodyPr/>
+                    <a:lstStyle/>
+                    <a:p>
+                      <a:pPr marL="0" marR="0" lvl="0" indent="0" algn="ctr" defTabSz="914400" rtl="0" eaLnBrk="1" fontAlgn="auto" latinLnBrk="0" hangingPunct="1">
+                        <a:lnSpc>
+                          <a:spcPct val="100000"/>
+                        </a:lnSpc>
+                        <a:spcBef>
+                          <a:spcPts val="0"/>
+                        </a:spcBef>
+                        <a:spcAft>
+                          <a:spcPts val="0"/>
+                        </a:spcAft>
+                        <a:buClrTx/>
+                        <a:buSzTx/>
+                        <a:buFontTx/>
+                        <a:buNone/>
+                        <a:tabLst/>
+                        <a:defRPr/>
+                      </a:pPr>
+                      <a:r>
+                        <a:rPr lang="zh-SG" altLang="en-US" dirty="0"/>
+                        <a:t>适用场景</a:t>
+                      </a:r>
+                    </a:p>
+                  </a:txBody>
+                  <a:tcPr anchor="ctr"/>
+                </a:tc>
+                <a:tc>
+                  <a:txBody>
+                    <a:bodyPr/>
+                    <a:lstStyle/>
+                    <a:p>
+                      <a:pPr algn="ctr"/>
+                      <a:r>
+                        <a:rPr lang="zh-CN" altLang="en-US" dirty="0"/>
+                        <a:t>风险</a:t>
+                      </a:r>
+                      <a:endParaRPr lang="zh-SG" altLang="en-US" dirty="0"/>
+                    </a:p>
+                  </a:txBody>
+                  <a:tcPr anchor="ctr"/>
+                </a:tc>
+                <a:extLst>
+                  <a:ext uri="{0D108BD9-81ED-4DB2-BD59-A6C34878D82A}">
+                    <a16:rowId xmlns:a16="http://schemas.microsoft.com/office/drawing/2014/main" val="3929282636"/>
+                  </a:ext>
+                </a:extLst>
+              </a:tr>
+              <a:tr h="370840">
+                <a:tc>
+                  <a:txBody>
+                    <a:bodyPr/>
+                    <a:lstStyle/>
+                    <a:p>
+                      <a:pPr marL="0" marR="0" lvl="0" indent="0" algn="ctr" defTabSz="914400" rtl="0" eaLnBrk="1" fontAlgn="auto" latinLnBrk="0" hangingPunct="1">
+                        <a:lnSpc>
+                          <a:spcPct val="100000"/>
+                        </a:lnSpc>
+                        <a:spcBef>
+                          <a:spcPts val="0"/>
+                        </a:spcBef>
+                        <a:spcAft>
+                          <a:spcPts val="0"/>
+                        </a:spcAft>
+                        <a:buClrTx/>
+                        <a:buSzTx/>
+                        <a:buFontTx/>
+                        <a:buNone/>
+                        <a:tabLst/>
+                        <a:defRPr/>
+                      </a:pPr>
+                      <a:r>
+                        <a:rPr lang="zh-SG" altLang="en-US" dirty="0"/>
+                        <a:t>单缓冲</a:t>
+                      </a:r>
+                    </a:p>
+                  </a:txBody>
+                  <a:tcPr anchor="ctr"/>
+                </a:tc>
+                <a:tc>
+                  <a:txBody>
+                    <a:bodyPr/>
+                    <a:lstStyle/>
+                    <a:p>
+                      <a:pPr marL="0" marR="0" lvl="0" indent="0" algn="ctr" defTabSz="914400" rtl="0" eaLnBrk="1" fontAlgn="auto" latinLnBrk="0" hangingPunct="1">
+                        <a:lnSpc>
+                          <a:spcPct val="100000"/>
+                        </a:lnSpc>
+                        <a:spcBef>
+                          <a:spcPts val="0"/>
+                        </a:spcBef>
+                        <a:spcAft>
+                          <a:spcPts val="0"/>
+                        </a:spcAft>
+                        <a:buClrTx/>
+                        <a:buSzTx/>
+                        <a:buFontTx/>
+                        <a:buNone/>
+                        <a:tabLst/>
+                        <a:defRPr/>
+                      </a:pPr>
+                      <a:r>
+                        <a:rPr lang="zh-CN" altLang="en-US" dirty="0"/>
+                        <a:t>低速、间歇接收</a:t>
+                      </a:r>
+                    </a:p>
+                  </a:txBody>
+                  <a:tcPr anchor="ctr"/>
+                </a:tc>
+                <a:tc>
+                  <a:txBody>
+                    <a:bodyPr/>
+                    <a:lstStyle/>
+                    <a:p>
+                      <a:pPr marL="0" marR="0" lvl="0" indent="0" algn="ctr" defTabSz="914400" rtl="0" eaLnBrk="1" fontAlgn="auto" latinLnBrk="0" hangingPunct="1">
+                        <a:lnSpc>
+                          <a:spcPct val="100000"/>
+                        </a:lnSpc>
+                        <a:spcBef>
+                          <a:spcPts val="0"/>
+                        </a:spcBef>
+                        <a:spcAft>
+                          <a:spcPts val="0"/>
+                        </a:spcAft>
+                        <a:buClrTx/>
+                        <a:buSzTx/>
+                        <a:buFontTx/>
+                        <a:buNone/>
+                        <a:tabLst/>
+                        <a:defRPr/>
+                      </a:pPr>
+                      <a:r>
+                        <a:rPr lang="en-US" altLang="zh-CN" dirty="0"/>
+                        <a:t>CPU</a:t>
+                      </a:r>
+                      <a:r>
+                        <a:rPr lang="zh-CN" altLang="en-US" dirty="0"/>
+                        <a:t>处理时可能停收或被覆盖</a:t>
+                      </a:r>
+                    </a:p>
+                  </a:txBody>
+                  <a:tcPr anchor="ctr"/>
+                </a:tc>
+                <a:extLst>
+                  <a:ext uri="{0D108BD9-81ED-4DB2-BD59-A6C34878D82A}">
+                    <a16:rowId xmlns:a16="http://schemas.microsoft.com/office/drawing/2014/main" val="655560618"/>
+                  </a:ext>
+                </a:extLst>
+              </a:tr>
+              <a:tr h="370840">
+                <a:tc>
+                  <a:txBody>
+                    <a:bodyPr/>
+                    <a:lstStyle/>
+                    <a:p>
+                      <a:pPr algn="ctr"/>
+                      <a:r>
+                        <a:rPr lang="zh-CN" altLang="en-US" dirty="0"/>
+                        <a:t>双缓冲</a:t>
+                      </a:r>
+                      <a:endParaRPr lang="zh-SG" altLang="en-US" dirty="0"/>
+                    </a:p>
+                  </a:txBody>
+                  <a:tcPr anchor="ctr"/>
+                </a:tc>
+                <a:tc>
+                  <a:txBody>
+                    <a:bodyPr/>
+                    <a:lstStyle/>
+                    <a:p>
+                      <a:pPr marL="0" marR="0" lvl="0" indent="0" algn="ctr" defTabSz="914400" rtl="0" eaLnBrk="1" fontAlgn="auto" latinLnBrk="0" hangingPunct="1">
+                        <a:lnSpc>
+                          <a:spcPct val="100000"/>
+                        </a:lnSpc>
+                        <a:spcBef>
+                          <a:spcPts val="0"/>
+                        </a:spcBef>
+                        <a:spcAft>
+                          <a:spcPts val="0"/>
+                        </a:spcAft>
+                        <a:buClrTx/>
+                        <a:buSzTx/>
+                        <a:buFontTx/>
+                        <a:buNone/>
+                        <a:tabLst/>
+                        <a:defRPr/>
+                      </a:pPr>
+                      <a:r>
+                        <a:rPr lang="zh-CN" altLang="en-US" dirty="0"/>
+                        <a:t>高频接收，定长数据</a:t>
+                      </a:r>
+                    </a:p>
+                  </a:txBody>
+                  <a:tcPr anchor="ctr"/>
+                </a:tc>
+                <a:tc>
+                  <a:txBody>
+                    <a:bodyPr/>
+                    <a:lstStyle/>
+                    <a:p>
+                      <a:pPr marL="0" marR="0" lvl="0" indent="0" algn="ctr" defTabSz="914400" rtl="0" eaLnBrk="1" fontAlgn="auto" latinLnBrk="0" hangingPunct="1">
+                        <a:lnSpc>
+                          <a:spcPct val="100000"/>
+                        </a:lnSpc>
+                        <a:spcBef>
+                          <a:spcPts val="0"/>
+                        </a:spcBef>
+                        <a:spcAft>
+                          <a:spcPts val="0"/>
+                        </a:spcAft>
+                        <a:buClrTx/>
+                        <a:buSzTx/>
+                        <a:buFontTx/>
+                        <a:buNone/>
+                        <a:tabLst/>
+                        <a:defRPr/>
+                      </a:pPr>
+                      <a:r>
+                        <a:rPr lang="en-US" altLang="zh-CN" dirty="0"/>
+                        <a:t>CPU</a:t>
+                      </a:r>
+                      <a:r>
+                        <a:rPr lang="zh-CN" altLang="en-US" dirty="0"/>
+                        <a:t>必须在另一个缓冲区写满前处理完</a:t>
+                      </a:r>
+                    </a:p>
+                  </a:txBody>
+                  <a:tcPr anchor="ctr"/>
+                </a:tc>
+                <a:extLst>
+                  <a:ext uri="{0D108BD9-81ED-4DB2-BD59-A6C34878D82A}">
+                    <a16:rowId xmlns:a16="http://schemas.microsoft.com/office/drawing/2014/main" val="228643444"/>
+                  </a:ext>
+                </a:extLst>
+              </a:tr>
+              <a:tr h="370840">
+                <a:tc>
+                  <a:txBody>
+                    <a:bodyPr/>
+                    <a:lstStyle/>
+                    <a:p>
+                      <a:pPr algn="ctr"/>
+                      <a:r>
+                        <a:rPr lang="zh-CN" altLang="en-US" dirty="0"/>
+                        <a:t>环形缓冲</a:t>
+                      </a:r>
+                      <a:endParaRPr lang="zh-SG" altLang="en-US" dirty="0"/>
+                    </a:p>
+                  </a:txBody>
+                  <a:tcPr anchor="ctr"/>
+                </a:tc>
+                <a:tc>
+                  <a:txBody>
+                    <a:bodyPr/>
+                    <a:lstStyle/>
+                    <a:p>
+                      <a:pPr algn="ctr"/>
+                      <a:r>
+                        <a:rPr lang="zh-CN" altLang="en-US" dirty="0"/>
+                        <a:t>连续接收，不定长数据</a:t>
+                      </a:r>
+                      <a:endParaRPr lang="zh-SG" altLang="en-US" dirty="0"/>
+                    </a:p>
+                  </a:txBody>
+                  <a:tcPr anchor="ctr"/>
+                </a:tc>
+                <a:tc>
+                  <a:txBody>
+                    <a:bodyPr/>
+                    <a:lstStyle/>
+                    <a:p>
+                      <a:pPr marL="0" marR="0" lvl="0" indent="0" algn="ctr" defTabSz="914400" rtl="0" eaLnBrk="1" fontAlgn="auto" latinLnBrk="0" hangingPunct="1">
+                        <a:lnSpc>
+                          <a:spcPct val="100000"/>
+                        </a:lnSpc>
+                        <a:spcBef>
+                          <a:spcPts val="0"/>
+                        </a:spcBef>
+                        <a:spcAft>
+                          <a:spcPts val="0"/>
+                        </a:spcAft>
+                        <a:buClrTx/>
+                        <a:buSzTx/>
+                        <a:buFontTx/>
+                        <a:buNone/>
+                        <a:tabLst/>
+                        <a:defRPr/>
+                      </a:pPr>
+                      <a:r>
+                        <a:rPr lang="zh-CN" altLang="en-US" dirty="0"/>
+                        <a:t>回绕、空</a:t>
+                      </a:r>
+                      <a:r>
+                        <a:rPr lang="en-US" altLang="zh-CN" dirty="0"/>
+                        <a:t>/</a:t>
+                      </a:r>
+                      <a:r>
+                        <a:rPr lang="zh-CN" altLang="en-US" dirty="0"/>
+                        <a:t>满判断等逻辑较复杂</a:t>
+                      </a:r>
+                    </a:p>
+                  </a:txBody>
+                  <a:tcPr anchor="ctr"/>
+                </a:tc>
+                <a:extLst>
+                  <a:ext uri="{0D108BD9-81ED-4DB2-BD59-A6C34878D82A}">
+                    <a16:rowId xmlns:a16="http://schemas.microsoft.com/office/drawing/2014/main" val="4223488968"/>
+                  </a:ext>
+                </a:extLst>
+              </a:tr>
+            </a:tbl>
+          </a:graphicData>
+        </a:graphic>
+      </p:graphicFrame>
+      <p:sp>
+        <p:nvSpPr>
+          <p:cNvPr id="6" name="文本框 5">
+            <a:extLst>
+              <a:ext uri="{FF2B5EF4-FFF2-40B4-BE49-F238E27FC236}">
+                <a16:creationId xmlns:a16="http://schemas.microsoft.com/office/drawing/2014/main" id="{CD730378-EB7B-5F23-2DD0-5CDC021BEA4B}"/>
+              </a:ext>
+            </a:extLst>
+          </p:cNvPr>
+          <p:cNvSpPr txBox="1"/>
+          <p:nvPr/>
+        </p:nvSpPr>
+        <p:spPr>
+          <a:xfrm>
+            <a:off x="2266064" y="4481624"/>
+            <a:ext cx="7659872" cy="954107"/>
+          </a:xfrm>
+          <a:prstGeom prst="rect">
+            <a:avLst/>
+          </a:prstGeom>
+          <a:noFill/>
+        </p:spPr>
+        <p:txBody>
+          <a:bodyPr wrap="square" rtlCol="0">
+            <a:spAutoFit/>
+          </a:bodyPr>
+          <a:lstStyle/>
+          <a:p>
+            <a:r>
+              <a:rPr lang="zh-CN" altLang="en-US" sz="2800" dirty="0"/>
+              <a:t>没有包打天下的方案，只有具体场景下的最优解</a:t>
+            </a:r>
+            <a:endParaRPr lang="en-US" altLang="zh-CN" sz="2800" dirty="0"/>
+          </a:p>
+          <a:p>
+            <a:r>
+              <a:rPr lang="zh-CN" altLang="en-US" sz="2800" dirty="0"/>
+              <a:t>（</a:t>
+            </a:r>
+            <a:r>
+              <a:rPr lang="en-US" altLang="zh-CN" sz="2800" dirty="0" err="1"/>
+              <a:t>Bip</a:t>
+            </a:r>
+            <a:r>
+              <a:rPr lang="en-US" altLang="zh-CN" sz="2800" dirty="0"/>
+              <a:t> Buffer</a:t>
+            </a:r>
+            <a:r>
+              <a:rPr lang="zh-CN" altLang="en-US" sz="2800" dirty="0"/>
+              <a:t>：那我来干嘛？）</a:t>
+            </a:r>
+            <a:endParaRPr lang="zh-SG" altLang="en-US" sz="2800" dirty="0"/>
+          </a:p>
+        </p:txBody>
+      </p:sp>
+    </p:spTree>
+    <p:extLst>
+      <p:ext uri="{BB962C8B-B14F-4D97-AF65-F5344CB8AC3E}">
+        <p14:creationId xmlns:p14="http://schemas.microsoft.com/office/powerpoint/2010/main" val="2438059577"/>
+      </p:ext>
+    </p:extLst>
+  </p:cSld>
+  <p:clrMapOvr>
+    <a:masterClrMapping/>
+  </p:clrMapOvr>
+</p:sld>
+</file>
+
+<file path=ppt/slides/slide16.xml><?xml version="1.0" encoding="utf-8"?>
+<p:sld xmlns:a="http://schemas.openxmlformats.org/drawingml/2006/main" xmlns:r="http://schemas.openxmlformats.org/officeDocument/2006/relationships" xmlns:p="http://schemas.openxmlformats.org/presentationml/2006/main">
+  <p:cSld>
+    <p:spTree>
+      <p:nvGrpSpPr>
+        <p:cNvPr id="1" name=""/>
+        <p:cNvGrpSpPr/>
+        <p:nvPr/>
+      </p:nvGrpSpPr>
+      <p:grpSpPr>
+        <a:xfrm>
+          <a:off x="0" y="0"/>
+          <a:ext cx="0" cy="0"/>
+          <a:chOff x="0" y="0"/>
+          <a:chExt cx="0" cy="0"/>
+        </a:xfrm>
+      </p:grpSpPr>
+      <p:pic>
+        <p:nvPicPr>
+          <p:cNvPr id="5" name="图片 4">
+            <a:extLst>
+              <a:ext uri="{FF2B5EF4-FFF2-40B4-BE49-F238E27FC236}">
+                <a16:creationId xmlns:a16="http://schemas.microsoft.com/office/drawing/2014/main" id="{4B8D10F5-AC6F-7FDF-CB14-31EB2601F194}"/>
+              </a:ext>
+            </a:extLst>
+          </p:cNvPr>
+          <p:cNvPicPr>
+            <a:picLocks noChangeAspect="1"/>
+          </p:cNvPicPr>
+          <p:nvPr/>
+        </p:nvPicPr>
+        <p:blipFill>
+          <a:blip r:embed="rId2"/>
+          <a:stretch>
+            <a:fillRect/>
+          </a:stretch>
+        </p:blipFill>
+        <p:spPr>
+          <a:xfrm>
+            <a:off x="10030800" y="1690688"/>
+            <a:ext cx="2161199" cy="5167312"/>
+          </a:xfrm>
+          <a:prstGeom prst="rect">
+            <a:avLst/>
+          </a:prstGeom>
+        </p:spPr>
+      </p:pic>
+      <p:sp>
+        <p:nvSpPr>
+          <p:cNvPr id="2" name="标题 1">
+            <a:extLst>
+              <a:ext uri="{FF2B5EF4-FFF2-40B4-BE49-F238E27FC236}">
+                <a16:creationId xmlns:a16="http://schemas.microsoft.com/office/drawing/2014/main" id="{AB8CC7EC-1944-58F3-9947-3541A10634F4}"/>
+              </a:ext>
+            </a:extLst>
+          </p:cNvPr>
+          <p:cNvSpPr>
+            <a:spLocks noGrp="1"/>
+          </p:cNvSpPr>
+          <p:nvPr>
+            <p:ph type="title"/>
+          </p:nvPr>
+        </p:nvSpPr>
+        <p:spPr/>
+        <p:txBody>
+          <a:bodyPr/>
+          <a:lstStyle/>
+          <a:p>
+            <a:r>
+              <a:rPr lang="zh-CN" altLang="en-US" dirty="0"/>
+              <a:t>通过双缓冲为多消费者提供一致快照</a:t>
+            </a:r>
+            <a:endParaRPr lang="zh-SG" altLang="en-US" dirty="0"/>
+          </a:p>
+        </p:txBody>
+      </p:sp>
+      <p:sp>
+        <p:nvSpPr>
+          <p:cNvPr id="3" name="内容占位符 2">
+            <a:extLst>
+              <a:ext uri="{FF2B5EF4-FFF2-40B4-BE49-F238E27FC236}">
+                <a16:creationId xmlns:a16="http://schemas.microsoft.com/office/drawing/2014/main" id="{E835B6FA-CB9C-9456-CE4F-CCE5C6032B33}"/>
+              </a:ext>
+            </a:extLst>
+          </p:cNvPr>
+          <p:cNvSpPr>
+            <a:spLocks noGrp="1"/>
+          </p:cNvSpPr>
+          <p:nvPr>
+            <p:ph idx="1"/>
+          </p:nvPr>
+        </p:nvSpPr>
+        <p:spPr/>
+        <p:txBody>
+          <a:bodyPr/>
+          <a:lstStyle/>
+          <a:p>
+            <a:r>
+              <a:rPr lang="zh-CN" altLang="en-US" dirty="0"/>
+              <a:t>双缓冲避免生产者</a:t>
+            </a:r>
+            <a:r>
+              <a:rPr lang="en-US" altLang="zh-CN" dirty="0"/>
+              <a:t>/</a:t>
+            </a:r>
+            <a:r>
+              <a:rPr lang="zh-CN" altLang="en-US" dirty="0"/>
+              <a:t>消费者竞态</a:t>
+            </a:r>
+            <a:endParaRPr lang="en-US" altLang="zh-CN" dirty="0"/>
+          </a:p>
+          <a:p>
+            <a:r>
+              <a:rPr lang="zh-CN" altLang="en-US" dirty="0"/>
+              <a:t>多个消费者只读取和复制内容，避免读竞态</a:t>
+            </a:r>
+            <a:endParaRPr lang="en-US" altLang="zh-CN" dirty="0"/>
+          </a:p>
+        </p:txBody>
+      </p:sp>
+    </p:spTree>
+    <p:extLst>
+      <p:ext uri="{BB962C8B-B14F-4D97-AF65-F5344CB8AC3E}">
+        <p14:creationId xmlns:p14="http://schemas.microsoft.com/office/powerpoint/2010/main" val="2626538597"/>
+      </p:ext>
+    </p:extLst>
+  </p:cSld>
+  <p:clrMapOvr>
+    <a:masterClrMapping/>
+  </p:clrMapOvr>
+</p:sld>
+</file>
+
+<file path=ppt/slides/slide17.xml><?xml version="1.0" encoding="utf-8"?>
+<p:sld xmlns:a="http://schemas.openxmlformats.org/drawingml/2006/main" xmlns:r="http://schemas.openxmlformats.org/officeDocument/2006/relationships" xmlns:p="http://schemas.openxmlformats.org/presentationml/2006/main">
+  <p:cSld>
+    <p:spTree>
+      <p:nvGrpSpPr>
+        <p:cNvPr id="1" name=""/>
+        <p:cNvGrpSpPr/>
+        <p:nvPr/>
+      </p:nvGrpSpPr>
+      <p:grpSpPr>
+        <a:xfrm>
+          <a:off x="0" y="0"/>
+          <a:ext cx="0" cy="0"/>
+          <a:chOff x="0" y="0"/>
+          <a:chExt cx="0" cy="0"/>
+        </a:xfrm>
+      </p:grpSpPr>
+      <p:sp>
+        <p:nvSpPr>
+          <p:cNvPr id="2" name="标题 1">
+            <a:extLst>
+              <a:ext uri="{FF2B5EF4-FFF2-40B4-BE49-F238E27FC236}">
+                <a16:creationId xmlns:a16="http://schemas.microsoft.com/office/drawing/2014/main" id="{4227B32F-DDDE-9B71-B4DE-893B5CABE653}"/>
+              </a:ext>
+            </a:extLst>
+          </p:cNvPr>
+          <p:cNvSpPr>
+            <a:spLocks noGrp="1"/>
+          </p:cNvSpPr>
+          <p:nvPr>
+            <p:ph type="title"/>
+          </p:nvPr>
+        </p:nvSpPr>
+        <p:spPr/>
+        <p:txBody>
+          <a:bodyPr/>
+          <a:lstStyle/>
+          <a:p>
+            <a:r>
+              <a:rPr lang="zh-CN" altLang="en-US" dirty="0"/>
+              <a:t>作业</a:t>
+            </a:r>
+            <a:r>
+              <a:rPr lang="en-US" altLang="zh-CN" dirty="0"/>
+              <a:t>3-2</a:t>
+            </a:r>
+            <a:endParaRPr lang="zh-SG" altLang="en-US" dirty="0"/>
+          </a:p>
+        </p:txBody>
+      </p:sp>
+      <p:sp>
+        <p:nvSpPr>
+          <p:cNvPr id="3" name="内容占位符 2">
+            <a:extLst>
+              <a:ext uri="{FF2B5EF4-FFF2-40B4-BE49-F238E27FC236}">
+                <a16:creationId xmlns:a16="http://schemas.microsoft.com/office/drawing/2014/main" id="{E035A84A-E879-9CB9-7975-EC6DCC9CEF49}"/>
+              </a:ext>
+            </a:extLst>
+          </p:cNvPr>
+          <p:cNvSpPr>
+            <a:spLocks noGrp="1"/>
+          </p:cNvSpPr>
+          <p:nvPr>
+            <p:ph idx="1"/>
+          </p:nvPr>
+        </p:nvSpPr>
+        <p:spPr/>
+        <p:txBody>
+          <a:bodyPr/>
+          <a:lstStyle/>
+          <a:p>
+            <a:r>
+              <a:rPr lang="zh-CN" altLang="en-US" dirty="0"/>
+              <a:t>创建遥控器数据解析与电机控制任务，根据遥控器拨杆挡位组合向</a:t>
+            </a:r>
+            <a:r>
+              <a:rPr lang="en-US" altLang="zh-CN" dirty="0"/>
+              <a:t>6020</a:t>
+            </a:r>
+            <a:r>
+              <a:rPr lang="zh-CN" altLang="en-US" dirty="0"/>
+              <a:t>电机发送相应指令</a:t>
+            </a:r>
+            <a:endParaRPr lang="en-US" altLang="zh-CN" dirty="0"/>
+          </a:p>
+          <a:p>
+            <a:pPr lvl="1"/>
+            <a:r>
+              <a:rPr lang="zh-CN" altLang="en-US" dirty="0"/>
+              <a:t>急停</a:t>
+            </a:r>
+            <a:endParaRPr lang="en-US" altLang="zh-CN" dirty="0"/>
+          </a:p>
+          <a:p>
+            <a:pPr lvl="1"/>
+            <a:r>
+              <a:rPr lang="zh-CN" altLang="en-US" dirty="0"/>
+              <a:t>正向旋转</a:t>
+            </a:r>
+            <a:endParaRPr lang="en-US" altLang="zh-CN" dirty="0"/>
+          </a:p>
+          <a:p>
+            <a:pPr lvl="1"/>
+            <a:r>
+              <a:rPr lang="zh-CN" altLang="en-US" dirty="0"/>
+              <a:t>反向旋转</a:t>
+            </a:r>
+            <a:endParaRPr lang="en-US" altLang="zh-CN" dirty="0"/>
+          </a:p>
+          <a:p>
+            <a:r>
+              <a:rPr lang="zh-CN" altLang="en-US" dirty="0"/>
+              <a:t>离开急停档位后要求必须先拨动拨轮才能进入正常控制模式</a:t>
+            </a:r>
+            <a:endParaRPr lang="en-US" altLang="zh-CN" dirty="0"/>
+          </a:p>
+          <a:p>
+            <a:r>
+              <a:rPr lang="zh-CN" altLang="en-US" dirty="0"/>
+              <a:t>电机状态相关变量需符合国际单位制（</a:t>
+            </a:r>
+            <a:r>
+              <a:rPr lang="en-US" altLang="zh-CN" dirty="0"/>
+              <a:t>rad</a:t>
+            </a:r>
+            <a:r>
+              <a:rPr lang="zh-CN" altLang="en-US" dirty="0"/>
+              <a:t>，</a:t>
+            </a:r>
+            <a:r>
+              <a:rPr lang="en-US" altLang="zh-CN" dirty="0"/>
+              <a:t>rad/s</a:t>
+            </a:r>
+            <a:r>
+              <a:rPr lang="zh-CN" altLang="en-US" dirty="0"/>
+              <a:t>，</a:t>
+            </a:r>
+            <a:r>
+              <a:rPr lang="en-US" altLang="zh-CN" dirty="0"/>
+              <a:t>Nm</a:t>
+            </a:r>
+            <a:r>
+              <a:rPr lang="zh-CN" altLang="en-US" dirty="0"/>
+              <a:t>，摄氏度）</a:t>
+            </a:r>
+            <a:endParaRPr lang="en-US" altLang="zh-CN" dirty="0"/>
+          </a:p>
+          <a:p>
+            <a:r>
+              <a:rPr lang="zh-CN" altLang="en-US" dirty="0"/>
+              <a:t>摇杆值需归一化到</a:t>
+            </a:r>
+            <a:r>
+              <a:rPr lang="en-US" altLang="zh-CN" dirty="0"/>
+              <a:t>[0, 1]</a:t>
+            </a:r>
+            <a:r>
+              <a:rPr lang="zh-CN" altLang="en-US" dirty="0"/>
+              <a:t>并添加四区</a:t>
+            </a:r>
+            <a:endParaRPr lang="en-US" altLang="zh-CN" dirty="0"/>
+          </a:p>
+        </p:txBody>
+      </p:sp>
+    </p:spTree>
+    <p:extLst>
+      <p:ext uri="{BB962C8B-B14F-4D97-AF65-F5344CB8AC3E}">
+        <p14:creationId xmlns:p14="http://schemas.microsoft.com/office/powerpoint/2010/main" val="564590828"/>
+      </p:ext>
+    </p:extLst>
+  </p:cSld>
+  <p:clrMapOvr>
+    <a:masterClrMapping/>
+  </p:clrMapOvr>
+</p:sld>
+</file>
+
+<file path=ppt/slides/slide18.xml><?xml version="1.0" encoding="utf-8"?>
+<p:sld xmlns:a="http://schemas.openxmlformats.org/drawingml/2006/main" xmlns:r="http://schemas.openxmlformats.org/officeDocument/2006/relationships" xmlns:p="http://schemas.openxmlformats.org/presentationml/2006/main">
+  <p:cSld>
+    <p:spTree>
+      <p:nvGrpSpPr>
+        <p:cNvPr id="1" name=""/>
+        <p:cNvGrpSpPr/>
+        <p:nvPr/>
+      </p:nvGrpSpPr>
+      <p:grpSpPr>
+        <a:xfrm>
+          <a:off x="0" y="0"/>
+          <a:ext cx="0" cy="0"/>
+          <a:chOff x="0" y="0"/>
+          <a:chExt cx="0" cy="0"/>
+        </a:xfrm>
+      </p:grpSpPr>
+      <p:pic>
+        <p:nvPicPr>
           <p:cNvPr id="7" name="图片 6">
             <a:extLst>
               <a:ext uri="{FF2B5EF4-FFF2-40B4-BE49-F238E27FC236}">
@@ -3665,7 +5767,99 @@
     </p:spTree>
     <p:extLst>
       <p:ext uri="{BB962C8B-B14F-4D97-AF65-F5344CB8AC3E}">
-        <p14:creationId xmlns:p14="http://schemas.microsoft.com/office/powerpoint/2010/main" val="2860811097"/>
+        <p14:creationId xmlns:p14="http://schemas.microsoft.com/office/powerpoint/2010/main" val="1550556734"/>
+      </p:ext>
+    </p:extLst>
+  </p:cSld>
+  <p:clrMapOvr>
+    <a:masterClrMapping/>
+  </p:clrMapOvr>
+</p:sld>
+</file>
+
+<file path=ppt/slides/slide19.xml><?xml version="1.0" encoding="utf-8"?>
+<p:sld xmlns:a="http://schemas.openxmlformats.org/drawingml/2006/main" xmlns:r="http://schemas.openxmlformats.org/officeDocument/2006/relationships" xmlns:p="http://schemas.openxmlformats.org/presentationml/2006/main">
+  <p:cSld>
+    <p:spTree>
+      <p:nvGrpSpPr>
+        <p:cNvPr id="1" name=""/>
+        <p:cNvGrpSpPr/>
+        <p:nvPr/>
+      </p:nvGrpSpPr>
+      <p:grpSpPr>
+        <a:xfrm>
+          <a:off x="0" y="0"/>
+          <a:ext cx="0" cy="0"/>
+          <a:chOff x="0" y="0"/>
+          <a:chExt cx="0" cy="0"/>
+        </a:xfrm>
+      </p:grpSpPr>
+      <p:sp>
+        <p:nvSpPr>
+          <p:cNvPr id="2" name="标题 1">
+            <a:extLst>
+              <a:ext uri="{FF2B5EF4-FFF2-40B4-BE49-F238E27FC236}">
+                <a16:creationId xmlns:a16="http://schemas.microsoft.com/office/drawing/2014/main" id="{475A1CFB-4175-6437-E901-9C3B5F236E06}"/>
+              </a:ext>
+            </a:extLst>
+          </p:cNvPr>
+          <p:cNvSpPr>
+            <a:spLocks noGrp="1"/>
+          </p:cNvSpPr>
+          <p:nvPr>
+            <p:ph type="ctrTitle"/>
+          </p:nvPr>
+        </p:nvSpPr>
+        <p:spPr/>
+        <p:txBody>
+          <a:bodyPr anchor="ctr"/>
+          <a:lstStyle/>
+          <a:p>
+            <a:r>
+              <a:rPr lang="en-US" altLang="zh-SG" dirty="0"/>
+              <a:t>3.3 </a:t>
+            </a:r>
+            <a:r>
+              <a:rPr lang="zh-CN" altLang="en-US" dirty="0"/>
+              <a:t>指令流设计</a:t>
+            </a:r>
+            <a:endParaRPr lang="zh-SG" altLang="en-US" dirty="0"/>
+          </a:p>
+        </p:txBody>
+      </p:sp>
+      <p:sp>
+        <p:nvSpPr>
+          <p:cNvPr id="3" name="副标题 2">
+            <a:extLst>
+              <a:ext uri="{FF2B5EF4-FFF2-40B4-BE49-F238E27FC236}">
+                <a16:creationId xmlns:a16="http://schemas.microsoft.com/office/drawing/2014/main" id="{7473E1F3-FD08-47D3-D26A-A5EACF7C2EDE}"/>
+              </a:ext>
+            </a:extLst>
+          </p:cNvPr>
+          <p:cNvSpPr>
+            <a:spLocks noGrp="1"/>
+          </p:cNvSpPr>
+          <p:nvPr>
+            <p:ph type="subTitle" idx="1"/>
+          </p:nvPr>
+        </p:nvSpPr>
+        <p:spPr/>
+        <p:txBody>
+          <a:bodyPr/>
+          <a:lstStyle/>
+          <a:p>
+            <a:r>
+              <a:rPr lang="zh-CN" altLang="en-US" dirty="0"/>
+              <a:t>要求：</a:t>
+            </a:r>
+            <a:endParaRPr lang="zh-SG" altLang="en-US" dirty="0"/>
+          </a:p>
+        </p:txBody>
+      </p:sp>
+    </p:spTree>
+    <p:extLst>
+      <p:ext uri="{BB962C8B-B14F-4D97-AF65-F5344CB8AC3E}">
+        <p14:creationId xmlns:p14="http://schemas.microsoft.com/office/powerpoint/2010/main" val="1850300986"/>
       </p:ext>
     </p:extLst>
   </p:cSld>
@@ -3809,6 +6003,319 @@
     <p:extLst>
       <p:ext uri="{BB962C8B-B14F-4D97-AF65-F5344CB8AC3E}">
         <p14:creationId xmlns:p14="http://schemas.microsoft.com/office/powerpoint/2010/main" val="2360895842"/>
+      </p:ext>
+    </p:extLst>
+  </p:cSld>
+  <p:clrMapOvr>
+    <a:masterClrMapping/>
+  </p:clrMapOvr>
+</p:sld>
+</file>
+
+<file path=ppt/slides/slide20.xml><?xml version="1.0" encoding="utf-8"?>
+<p:sld xmlns:a="http://schemas.openxmlformats.org/drawingml/2006/main" xmlns:r="http://schemas.openxmlformats.org/officeDocument/2006/relationships" xmlns:p="http://schemas.openxmlformats.org/presentationml/2006/main">
+  <p:cSld>
+    <p:spTree>
+      <p:nvGrpSpPr>
+        <p:cNvPr id="1" name=""/>
+        <p:cNvGrpSpPr/>
+        <p:nvPr/>
+      </p:nvGrpSpPr>
+      <p:grpSpPr>
+        <a:xfrm>
+          <a:off x="0" y="0"/>
+          <a:ext cx="0" cy="0"/>
+          <a:chOff x="0" y="0"/>
+          <a:chExt cx="0" cy="0"/>
+        </a:xfrm>
+      </p:grpSpPr>
+      <p:sp>
+        <p:nvSpPr>
+          <p:cNvPr id="2" name="标题 1">
+            <a:extLst>
+              <a:ext uri="{FF2B5EF4-FFF2-40B4-BE49-F238E27FC236}">
+                <a16:creationId xmlns:a16="http://schemas.microsoft.com/office/drawing/2014/main" id="{F128737A-E9EC-8EE1-B998-5CA033466F19}"/>
+              </a:ext>
+            </a:extLst>
+          </p:cNvPr>
+          <p:cNvSpPr>
+            <a:spLocks noGrp="1"/>
+          </p:cNvSpPr>
+          <p:nvPr>
+            <p:ph type="title"/>
+          </p:nvPr>
+        </p:nvSpPr>
+        <p:spPr/>
+        <p:txBody>
+          <a:bodyPr/>
+          <a:lstStyle/>
+          <a:p>
+            <a:r>
+              <a:rPr lang="zh-CN" altLang="en-US" dirty="0"/>
+              <a:t>在</a:t>
+            </a:r>
+            <a:r>
+              <a:rPr lang="en-US" altLang="zh-CN" dirty="0"/>
+              <a:t>WASD</a:t>
+            </a:r>
+            <a:r>
+              <a:rPr lang="zh-CN" altLang="en-US" dirty="0"/>
+              <a:t>按下与机器人移动之间</a:t>
+            </a:r>
+            <a:endParaRPr lang="zh-SG" altLang="en-US" dirty="0"/>
+          </a:p>
+        </p:txBody>
+      </p:sp>
+      <p:sp>
+        <p:nvSpPr>
+          <p:cNvPr id="3" name="内容占位符 2">
+            <a:extLst>
+              <a:ext uri="{FF2B5EF4-FFF2-40B4-BE49-F238E27FC236}">
+                <a16:creationId xmlns:a16="http://schemas.microsoft.com/office/drawing/2014/main" id="{B9C79689-4BC4-08BD-9E57-6DDB345CB76C}"/>
+              </a:ext>
+            </a:extLst>
+          </p:cNvPr>
+          <p:cNvSpPr>
+            <a:spLocks noGrp="1"/>
+          </p:cNvSpPr>
+          <p:nvPr>
+            <p:ph idx="1"/>
+          </p:nvPr>
+        </p:nvSpPr>
+        <p:spPr>
+          <a:xfrm>
+            <a:off x="838200" y="1825624"/>
+            <a:ext cx="10515600" cy="5032375"/>
+          </a:xfrm>
+        </p:spPr>
+        <p:txBody>
+          <a:bodyPr>
+            <a:normAutofit/>
+          </a:bodyPr>
+          <a:lstStyle/>
+          <a:p>
+            <a:r>
+              <a:rPr lang="zh-CN" altLang="en-US" dirty="0"/>
+              <a:t>从指令数据到电机输出，要经过外设接收、</a:t>
+            </a:r>
+            <a:r>
+              <a:rPr lang="en-US" altLang="zh-CN" dirty="0"/>
+              <a:t>DMA</a:t>
+            </a:r>
+            <a:r>
+              <a:rPr lang="zh-CN" altLang="en-US" dirty="0"/>
+              <a:t>搬运、中断触发、任务调度、协议解析、模式仲裁和控制计算这些环节</a:t>
+            </a:r>
+            <a:endParaRPr lang="en-US" altLang="zh-CN" dirty="0"/>
+          </a:p>
+          <a:p>
+            <a:r>
+              <a:rPr lang="zh-CN" altLang="en-US" dirty="0"/>
+              <a:t>需要区分</a:t>
+            </a:r>
+            <a:r>
+              <a:rPr lang="en-US" altLang="zh-CN" dirty="0"/>
+              <a:t>DMA</a:t>
+            </a:r>
+            <a:r>
+              <a:rPr lang="zh-CN" altLang="en-US" dirty="0"/>
+              <a:t>操作、中断触发和有效数据帧：</a:t>
+            </a:r>
+          </a:p>
+          <a:p>
+            <a:pPr lvl="1"/>
+            <a:r>
+              <a:rPr lang="en-US" altLang="zh-CN" dirty="0"/>
+              <a:t>DMA</a:t>
+            </a:r>
+            <a:r>
+              <a:rPr lang="zh-CN" altLang="en-US" dirty="0"/>
+              <a:t>写入多少字节</a:t>
+            </a:r>
+          </a:p>
+          <a:p>
+            <a:pPr lvl="1"/>
+            <a:r>
+              <a:rPr lang="zh-CN" altLang="en-US" dirty="0"/>
+              <a:t>何时产生空闲、半传输或完成事件</a:t>
+            </a:r>
+          </a:p>
+          <a:p>
+            <a:pPr lvl="1"/>
+            <a:r>
+              <a:rPr lang="zh-CN" altLang="en-US" dirty="0"/>
+              <a:t>一帧数据从哪里开始、在哪里结束</a:t>
+            </a:r>
+          </a:p>
+          <a:p>
+            <a:r>
+              <a:rPr lang="zh-CN" altLang="en-US" dirty="0"/>
+              <a:t>三者不一定完全同步：</a:t>
+            </a:r>
+          </a:p>
+          <a:p>
+            <a:pPr lvl="1"/>
+            <a:r>
+              <a:rPr lang="zh-CN" altLang="en-US" dirty="0"/>
+              <a:t>如果未关闭</a:t>
+            </a:r>
+            <a:r>
+              <a:rPr lang="en-US" altLang="zh-CN" dirty="0"/>
+              <a:t>DMA</a:t>
+            </a:r>
+            <a:r>
+              <a:rPr lang="zh-CN" altLang="en-US" dirty="0"/>
+              <a:t>传输半满中断，接收长度达到缓冲区长度一半时就会触发中断</a:t>
+            </a:r>
+          </a:p>
+          <a:p>
+            <a:pPr lvl="1"/>
+            <a:r>
+              <a:rPr lang="zh-CN" altLang="en-US" dirty="0"/>
+              <a:t>两帧数据可能间隔过小导致空闲中断未被触发，串口连续接收两帧造成粘包</a:t>
+            </a:r>
+            <a:endParaRPr lang="zh-SG" altLang="en-US" dirty="0"/>
+          </a:p>
+        </p:txBody>
+      </p:sp>
+    </p:spTree>
+    <p:extLst>
+      <p:ext uri="{BB962C8B-B14F-4D97-AF65-F5344CB8AC3E}">
+        <p14:creationId xmlns:p14="http://schemas.microsoft.com/office/powerpoint/2010/main" val="2959290516"/>
+      </p:ext>
+    </p:extLst>
+  </p:cSld>
+  <p:clrMapOvr>
+    <a:masterClrMapping/>
+  </p:clrMapOvr>
+</p:sld>
+</file>
+
+<file path=ppt/slides/slide21.xml><?xml version="1.0" encoding="utf-8"?>
+<p:sld xmlns:a="http://schemas.openxmlformats.org/drawingml/2006/main" xmlns:r="http://schemas.openxmlformats.org/officeDocument/2006/relationships" xmlns:p="http://schemas.openxmlformats.org/presentationml/2006/main">
+  <p:cSld>
+    <p:spTree>
+      <p:nvGrpSpPr>
+        <p:cNvPr id="1" name=""/>
+        <p:cNvGrpSpPr/>
+        <p:nvPr/>
+      </p:nvGrpSpPr>
+      <p:grpSpPr>
+        <a:xfrm>
+          <a:off x="0" y="0"/>
+          <a:ext cx="0" cy="0"/>
+          <a:chOff x="0" y="0"/>
+          <a:chExt cx="0" cy="0"/>
+        </a:xfrm>
+      </p:grpSpPr>
+      <p:sp>
+        <p:nvSpPr>
+          <p:cNvPr id="2" name="标题 1">
+            <a:extLst>
+              <a:ext uri="{FF2B5EF4-FFF2-40B4-BE49-F238E27FC236}">
+                <a16:creationId xmlns:a16="http://schemas.microsoft.com/office/drawing/2014/main" id="{EA85CBBC-A23E-7034-F256-3A5C99538CBA}"/>
+              </a:ext>
+            </a:extLst>
+          </p:cNvPr>
+          <p:cNvSpPr>
+            <a:spLocks noGrp="1"/>
+          </p:cNvSpPr>
+          <p:nvPr>
+            <p:ph type="title"/>
+          </p:nvPr>
+        </p:nvSpPr>
+        <p:spPr/>
+        <p:txBody>
+          <a:bodyPr/>
+          <a:lstStyle/>
+          <a:p>
+            <a:r>
+              <a:rPr lang="en-GB" altLang="zh-CN" dirty="0"/>
+              <a:t>ISR</a:t>
+            </a:r>
+            <a:r>
+              <a:rPr lang="zh-CN" altLang="en-US" dirty="0"/>
+              <a:t>驱动</a:t>
+            </a:r>
+            <a:endParaRPr lang="zh-SG" altLang="en-US" dirty="0"/>
+          </a:p>
+        </p:txBody>
+      </p:sp>
+      <p:sp>
+        <p:nvSpPr>
+          <p:cNvPr id="3" name="内容占位符 2">
+            <a:extLst>
+              <a:ext uri="{FF2B5EF4-FFF2-40B4-BE49-F238E27FC236}">
+                <a16:creationId xmlns:a16="http://schemas.microsoft.com/office/drawing/2014/main" id="{E60FDBF4-EF08-36C2-2529-B24853B42D3C}"/>
+              </a:ext>
+            </a:extLst>
+          </p:cNvPr>
+          <p:cNvSpPr>
+            <a:spLocks noGrp="1"/>
+          </p:cNvSpPr>
+          <p:nvPr>
+            <p:ph idx="1"/>
+          </p:nvPr>
+        </p:nvSpPr>
+        <p:spPr/>
+        <p:txBody>
+          <a:bodyPr/>
+          <a:lstStyle/>
+          <a:p>
+            <a:r>
+              <a:rPr lang="zh-CN" altLang="en-US" dirty="0"/>
+              <a:t>有些操作不应当等待线程被唤醒后进行。双缓冲切换、时间戳记录等必须尽快完成。</a:t>
+            </a:r>
+            <a:endParaRPr lang="en-US" altLang="zh-CN" dirty="0"/>
+          </a:p>
+          <a:p>
+            <a:r>
+              <a:rPr lang="en-US" altLang="zh-CN" dirty="0"/>
+              <a:t>ISR</a:t>
+            </a:r>
+            <a:r>
+              <a:rPr lang="zh-CN" altLang="en-US" dirty="0"/>
+              <a:t>驱动的思路是把高频路径压成由硬件事件推动的数据流：中断负责交接与状态推进，线程负责展开后续处理。目标是尽量不让敏感路径依赖</a:t>
+            </a:r>
+            <a:r>
+              <a:rPr lang="en-US" altLang="zh-CN" dirty="0"/>
+              <a:t>mutex</a:t>
+            </a:r>
+            <a:r>
+              <a:rPr lang="zh-CN" altLang="en-US" dirty="0"/>
+              <a:t>、阻塞式</a:t>
+            </a:r>
+            <a:r>
+              <a:rPr lang="en-US" altLang="zh-CN" dirty="0"/>
+              <a:t>OS</a:t>
+            </a:r>
+            <a:r>
+              <a:rPr lang="zh-CN" altLang="en-US" dirty="0"/>
+              <a:t>队列或长时间关中断。</a:t>
+            </a:r>
+            <a:endParaRPr lang="en-US" altLang="zh-CN" dirty="0"/>
+          </a:p>
+          <a:p>
+            <a:r>
+              <a:rPr lang="zh-CN" altLang="en-US" dirty="0"/>
+              <a:t>这样设计使得高频路径的最坏时延更容易估计；回调、中断、线程的职责更分明；更少依赖任务调度顺序，</a:t>
+            </a:r>
+            <a:r>
+              <a:rPr lang="en-US" altLang="zh-CN" dirty="0"/>
+              <a:t>debug</a:t>
+            </a:r>
+            <a:r>
+              <a:rPr lang="zh-CN" altLang="en-US" dirty="0"/>
+              <a:t>时也更容易定位问题出在哪个部分。</a:t>
+            </a:r>
+            <a:endParaRPr lang="en-US" altLang="zh-CN" dirty="0"/>
+          </a:p>
+        </p:txBody>
+      </p:sp>
+    </p:spTree>
+    <p:extLst>
+      <p:ext uri="{BB962C8B-B14F-4D97-AF65-F5344CB8AC3E}">
+        <p14:creationId xmlns:p14="http://schemas.microsoft.com/office/powerpoint/2010/main" val="2138134174"/>
       </p:ext>
     </p:extLst>
   </p:cSld>
@@ -4762,7 +7269,7 @@
           <p:cNvPr id="2" name="标题 1">
             <a:extLst>
               <a:ext uri="{FF2B5EF4-FFF2-40B4-BE49-F238E27FC236}">
-                <a16:creationId xmlns:a16="http://schemas.microsoft.com/office/drawing/2014/main" id="{AD5C27AB-83EE-8321-4552-51EB09D07A1E}"/>
+                <a16:creationId xmlns:a16="http://schemas.microsoft.com/office/drawing/2014/main" id="{D78F73F0-C162-EE84-4BCA-C31F426B134A}"/>
               </a:ext>
             </a:extLst>
           </p:cNvPr>
@@ -4780,11 +7287,11 @@
           <a:p>
             <a:r>
               <a:rPr lang="en-US" altLang="zh-SG" dirty="0"/>
-              <a:t>3.2</a:t>
-            </a:r>
-            <a:r>
-              <a:rPr lang="zh-CN" altLang="en-US" dirty="0"/>
-              <a:t> 线程间通信</a:t>
+              <a:t>3.2 </a:t>
+            </a:r>
+            <a:r>
+              <a:rPr lang="zh-CN" altLang="en-US" dirty="0"/>
+              <a:t>并发处理</a:t>
             </a:r>
             <a:endParaRPr lang="zh-SG" altLang="en-US" dirty="0"/>
           </a:p>
@@ -4795,7 +7302,7 @@
           <p:cNvPr id="3" name="副标题 2">
             <a:extLst>
               <a:ext uri="{FF2B5EF4-FFF2-40B4-BE49-F238E27FC236}">
-                <a16:creationId xmlns:a16="http://schemas.microsoft.com/office/drawing/2014/main" id="{BC0B9151-62C8-3369-2EC7-8184BB254DD6}"/>
+                <a16:creationId xmlns:a16="http://schemas.microsoft.com/office/drawing/2014/main" id="{F4F04592-ED7D-9B41-035C-2EC0356609B2}"/>
               </a:ext>
             </a:extLst>
           </p:cNvPr>
@@ -4827,29 +7334,14 @@
               <a:buFont typeface="Arial" panose="020B0604020202020204" pitchFamily="34" charset="0"/>
               <a:buChar char="•"/>
             </a:pPr>
-            <a:r>
-              <a:rPr lang="zh-CN" altLang="en-US" dirty="0"/>
-              <a:t>任务与任务通信</a:t>
-            </a:r>
-            <a:endParaRPr lang="en-US" altLang="zh-CN" dirty="0"/>
-          </a:p>
-          <a:p>
-            <a:pPr marL="342900" indent="-342900">
-              <a:buFont typeface="Arial" panose="020B0604020202020204" pitchFamily="34" charset="0"/>
-              <a:buChar char="•"/>
-            </a:pPr>
-            <a:r>
-              <a:rPr lang="zh-CN" altLang="en-US" dirty="0"/>
-              <a:t>中断与任务通信</a:t>
-            </a:r>
-            <a:endParaRPr lang="en-US" altLang="zh-CN" dirty="0"/>
+            <a:endParaRPr lang="zh-SG" altLang="en-US" dirty="0"/>
           </a:p>
         </p:txBody>
       </p:sp>
     </p:spTree>
     <p:extLst>
       <p:ext uri="{BB962C8B-B14F-4D97-AF65-F5344CB8AC3E}">
-        <p14:creationId xmlns:p14="http://schemas.microsoft.com/office/powerpoint/2010/main" val="3612023545"/>
+        <p14:creationId xmlns:p14="http://schemas.microsoft.com/office/powerpoint/2010/main" val="508478267"/>
       </p:ext>
     </p:extLst>
   </p:cSld>
@@ -4881,7 +7373,7 @@
           <p:cNvPr id="2" name="标题 1">
             <a:extLst>
               <a:ext uri="{FF2B5EF4-FFF2-40B4-BE49-F238E27FC236}">
-                <a16:creationId xmlns:a16="http://schemas.microsoft.com/office/drawing/2014/main" id="{4227B32F-DDDE-9B71-B4DE-893B5CABE653}"/>
+                <a16:creationId xmlns:a16="http://schemas.microsoft.com/office/drawing/2014/main" id="{4EE56269-4C66-DD28-2D49-7333AFC6A95F}"/>
               </a:ext>
             </a:extLst>
           </p:cNvPr>
@@ -4899,88 +7391,426 @@
           <a:p>
             <a:r>
               <a:rPr lang="zh-CN" altLang="en-US" dirty="0"/>
-              <a:t>作业</a:t>
+              <a:t>单核</a:t>
             </a:r>
             <a:r>
               <a:rPr lang="en-US" altLang="zh-CN" dirty="0"/>
-              <a:t>3-2</a:t>
+              <a:t>MCU</a:t>
+            </a:r>
+            <a:r>
+              <a:rPr lang="zh-CN" altLang="en-US" dirty="0"/>
+              <a:t>也会有竞态</a:t>
             </a:r>
             <a:endParaRPr lang="zh-SG" altLang="en-US" dirty="0"/>
           </a:p>
         </p:txBody>
       </p:sp>
-      <p:sp>
-        <p:nvSpPr>
-          <p:cNvPr id="3" name="内容占位符 2">
-            <a:extLst>
-              <a:ext uri="{FF2B5EF4-FFF2-40B4-BE49-F238E27FC236}">
-                <a16:creationId xmlns:a16="http://schemas.microsoft.com/office/drawing/2014/main" id="{E035A84A-E879-9CB9-7975-EC6DCC9CEF49}"/>
-              </a:ext>
-            </a:extLst>
-          </p:cNvPr>
-          <p:cNvSpPr>
-            <a:spLocks noGrp="1"/>
-          </p:cNvSpPr>
+      <p:graphicFrame>
+        <p:nvGraphicFramePr>
+          <p:cNvPr id="5" name="内容占位符 4">
+            <a:extLst>
+              <a:ext uri="{FF2B5EF4-FFF2-40B4-BE49-F238E27FC236}">
+                <a16:creationId xmlns:a16="http://schemas.microsoft.com/office/drawing/2014/main" id="{4698B33D-D686-5F4B-37B0-0A8186D64E26}"/>
+              </a:ext>
+            </a:extLst>
+          </p:cNvPr>
+          <p:cNvGraphicFramePr>
+            <a:graphicFrameLocks noGrp="1"/>
+          </p:cNvGraphicFramePr>
           <p:nvPr>
             <p:ph idx="1"/>
-          </p:nvPr>
-        </p:nvSpPr>
-        <p:spPr/>
-        <p:txBody>
-          <a:bodyPr/>
-          <a:lstStyle/>
-          <a:p>
-            <a:r>
-              <a:rPr lang="zh-CN" altLang="en-US" dirty="0"/>
-              <a:t>创建遥控器数据解析与电机控制任务，根据遥控器拨杆挡位组合向</a:t>
-            </a:r>
-            <a:r>
-              <a:rPr lang="en-US" altLang="zh-CN" dirty="0"/>
-              <a:t>6020</a:t>
-            </a:r>
-            <a:r>
-              <a:rPr lang="zh-CN" altLang="en-US" dirty="0"/>
-              <a:t>电机发送相应指令</a:t>
-            </a:r>
-            <a:endParaRPr lang="en-US" altLang="zh-CN" dirty="0"/>
-          </a:p>
-          <a:p>
-            <a:pPr lvl="1"/>
-            <a:r>
-              <a:rPr lang="zh-CN" altLang="en-US" dirty="0"/>
-              <a:t>急停</a:t>
-            </a:r>
-            <a:endParaRPr lang="en-US" altLang="zh-CN" dirty="0"/>
-          </a:p>
-          <a:p>
-            <a:pPr lvl="1"/>
-            <a:r>
-              <a:rPr lang="zh-CN" altLang="en-US" dirty="0"/>
-              <a:t>正向旋转</a:t>
-            </a:r>
-            <a:endParaRPr lang="en-US" altLang="zh-CN" dirty="0"/>
-          </a:p>
-          <a:p>
-            <a:pPr lvl="1"/>
-            <a:r>
-              <a:rPr lang="zh-CN" altLang="en-US" dirty="0"/>
-              <a:t>反向旋转</a:t>
-            </a:r>
-            <a:endParaRPr lang="en-US" altLang="zh-CN" dirty="0"/>
-          </a:p>
-          <a:p>
-            <a:r>
-              <a:rPr lang="zh-CN" altLang="en-US" dirty="0"/>
-              <a:t>离开急停档位后要求必须先拨动拨轮才能进入正常控制模式</a:t>
-            </a:r>
-            <a:endParaRPr lang="en-US" altLang="zh-CN" dirty="0"/>
+            <p:extLst>
+              <p:ext uri="{D42A27DB-BD31-4B8C-83A1-F6EECF244321}">
+                <p14:modId xmlns:p14="http://schemas.microsoft.com/office/powerpoint/2010/main" val="1883723534"/>
+              </p:ext>
+            </p:extLst>
+          </p:nvPr>
+        </p:nvGraphicFramePr>
+        <p:xfrm>
+          <a:off x="838203" y="3429000"/>
+          <a:ext cx="10515597" cy="2021840"/>
+        </p:xfrm>
+        <a:graphic>
+          <a:graphicData uri="http://schemas.openxmlformats.org/drawingml/2006/table">
+            <a:tbl>
+              <a:tblPr firstRow="1" bandRow="1">
+                <a:tableStyleId>{5C22544A-7EE6-4342-B048-85BDC9FD1C3A}</a:tableStyleId>
+              </a:tblPr>
+              <a:tblGrid>
+                <a:gridCol w="3505199">
+                  <a:extLst>
+                    <a:ext uri="{9D8B030D-6E8A-4147-A177-3AD203B41FA5}">
+                      <a16:colId xmlns:a16="http://schemas.microsoft.com/office/drawing/2014/main" val="1232074980"/>
+                    </a:ext>
+                  </a:extLst>
+                </a:gridCol>
+                <a:gridCol w="3505199">
+                  <a:extLst>
+                    <a:ext uri="{9D8B030D-6E8A-4147-A177-3AD203B41FA5}">
+                      <a16:colId xmlns:a16="http://schemas.microsoft.com/office/drawing/2014/main" val="809044969"/>
+                    </a:ext>
+                  </a:extLst>
+                </a:gridCol>
+                <a:gridCol w="3505199">
+                  <a:extLst>
+                    <a:ext uri="{9D8B030D-6E8A-4147-A177-3AD203B41FA5}">
+                      <a16:colId xmlns:a16="http://schemas.microsoft.com/office/drawing/2014/main" val="4076172953"/>
+                    </a:ext>
+                  </a:extLst>
+                </a:gridCol>
+              </a:tblGrid>
+              <a:tr h="370840">
+                <a:tc>
+                  <a:txBody>
+                    <a:bodyPr/>
+                    <a:lstStyle/>
+                    <a:p>
+                      <a:pPr algn="ctr"/>
+                      <a:r>
+                        <a:rPr lang="zh-CN" altLang="en-US" dirty="0"/>
+                        <a:t>主体</a:t>
+                      </a:r>
+                      <a:endParaRPr lang="zh-SG" altLang="en-US" dirty="0"/>
+                    </a:p>
+                  </a:txBody>
+                  <a:tcPr anchor="ctr"/>
+                </a:tc>
+                <a:tc>
+                  <a:txBody>
+                    <a:bodyPr/>
+                    <a:lstStyle/>
+                    <a:p>
+                      <a:pPr algn="ctr"/>
+                      <a:r>
+                        <a:rPr lang="zh-CN" altLang="en-US" dirty="0"/>
+                        <a:t>职责</a:t>
+                      </a:r>
+                      <a:endParaRPr lang="zh-SG" altLang="en-US" dirty="0"/>
+                    </a:p>
+                  </a:txBody>
+                  <a:tcPr anchor="ctr"/>
+                </a:tc>
+                <a:tc>
+                  <a:txBody>
+                    <a:bodyPr/>
+                    <a:lstStyle/>
+                    <a:p>
+                      <a:pPr algn="ctr"/>
+                      <a:r>
+                        <a:rPr lang="zh-CN" altLang="en-US" dirty="0"/>
+                        <a:t>风险</a:t>
+                      </a:r>
+                      <a:endParaRPr lang="zh-SG" altLang="en-US" dirty="0"/>
+                    </a:p>
+                  </a:txBody>
+                  <a:tcPr anchor="ctr"/>
+                </a:tc>
+                <a:extLst>
+                  <a:ext uri="{0D108BD9-81ED-4DB2-BD59-A6C34878D82A}">
+                    <a16:rowId xmlns:a16="http://schemas.microsoft.com/office/drawing/2014/main" val="3568581710"/>
+                  </a:ext>
+                </a:extLst>
+              </a:tr>
+              <a:tr h="370840">
+                <a:tc>
+                  <a:txBody>
+                    <a:bodyPr/>
+                    <a:lstStyle/>
+                    <a:p>
+                      <a:pPr algn="ctr"/>
+                      <a:r>
+                        <a:rPr lang="en-US" altLang="zh-CN" dirty="0"/>
+                        <a:t>RTOS</a:t>
+                      </a:r>
+                      <a:r>
+                        <a:rPr lang="zh-CN" altLang="en-US" dirty="0"/>
+                        <a:t>任务</a:t>
+                      </a:r>
+                      <a:endParaRPr lang="zh-SG" altLang="en-US" dirty="0"/>
+                    </a:p>
+                  </a:txBody>
+                  <a:tcPr anchor="ctr"/>
+                </a:tc>
+                <a:tc>
+                  <a:txBody>
+                    <a:bodyPr/>
+                    <a:lstStyle/>
+                    <a:p>
+                      <a:pPr algn="ctr"/>
+                      <a:r>
+                        <a:rPr lang="zh-SG" altLang="en-US" sz="1800" b="0" i="0" kern="1200" dirty="0">
+                          <a:solidFill>
+                            <a:schemeClr val="dk1"/>
+                          </a:solidFill>
+                          <a:effectLst/>
+                          <a:latin typeface="+mn-lt"/>
+                          <a:ea typeface="+mn-ea"/>
+                          <a:cs typeface="+mn-cs"/>
+                        </a:rPr>
+                        <a:t>解析、仲裁、控制、通信</a:t>
+                      </a:r>
+                      <a:r>
+                        <a:rPr lang="zh-CN" altLang="en-US" sz="1800" b="0" i="0" kern="1200" dirty="0">
+                          <a:solidFill>
+                            <a:schemeClr val="dk1"/>
+                          </a:solidFill>
+                          <a:effectLst/>
+                          <a:latin typeface="+mn-lt"/>
+                          <a:ea typeface="+mn-ea"/>
+                          <a:cs typeface="+mn-cs"/>
+                        </a:rPr>
+                        <a:t>等操作</a:t>
+                      </a:r>
+                      <a:endParaRPr lang="zh-SG" altLang="en-US" dirty="0"/>
+                    </a:p>
+                  </a:txBody>
+                  <a:tcPr anchor="ctr"/>
+                </a:tc>
+                <a:tc>
+                  <a:txBody>
+                    <a:bodyPr/>
+                    <a:lstStyle/>
+                    <a:p>
+                      <a:pPr algn="ctr"/>
+                      <a:r>
+                        <a:rPr lang="zh-CN" altLang="en-US" sz="1800" b="0" i="0" kern="1200" dirty="0">
+                          <a:solidFill>
+                            <a:schemeClr val="dk1"/>
+                          </a:solidFill>
+                          <a:effectLst/>
+                          <a:latin typeface="+mn-lt"/>
+                          <a:ea typeface="+mn-ea"/>
+                          <a:cs typeface="+mn-cs"/>
+                        </a:rPr>
+                        <a:t>可能被抢占，也可能阻塞等待事件</a:t>
+                      </a:r>
+                      <a:endParaRPr lang="zh-SG" altLang="en-US" dirty="0"/>
+                    </a:p>
+                  </a:txBody>
+                  <a:tcPr anchor="ctr"/>
+                </a:tc>
+                <a:extLst>
+                  <a:ext uri="{0D108BD9-81ED-4DB2-BD59-A6C34878D82A}">
+                    <a16:rowId xmlns:a16="http://schemas.microsoft.com/office/drawing/2014/main" val="2462778617"/>
+                  </a:ext>
+                </a:extLst>
+              </a:tr>
+              <a:tr h="370840">
+                <a:tc>
+                  <a:txBody>
+                    <a:bodyPr/>
+                    <a:lstStyle/>
+                    <a:p>
+                      <a:pPr algn="ctr"/>
+                      <a:r>
+                        <a:rPr lang="en-US" altLang="zh-CN" dirty="0"/>
+                        <a:t>ISR</a:t>
+                      </a:r>
+                      <a:endParaRPr lang="zh-SG" altLang="en-US" dirty="0"/>
+                    </a:p>
+                  </a:txBody>
+                  <a:tcPr anchor="ctr"/>
+                </a:tc>
+                <a:tc>
+                  <a:txBody>
+                    <a:bodyPr/>
+                    <a:lstStyle/>
+                    <a:p>
+                      <a:pPr algn="l" rtl="0" fontAlgn="t"/>
+                      <a:r>
+                        <a:rPr lang="zh-CN" altLang="en-US" dirty="0">
+                          <a:solidFill>
+                            <a:srgbClr val="222222"/>
+                          </a:solidFill>
+                          <a:effectLst/>
+                        </a:rPr>
+                        <a:t>响应硬件事件，记录状态并唤醒任务</a:t>
+                      </a:r>
+                    </a:p>
+                  </a:txBody>
+                  <a:tcPr marL="38100" marR="38100" marT="19050" marB="19050" anchor="ctr"/>
+                </a:tc>
+                <a:tc>
+                  <a:txBody>
+                    <a:bodyPr/>
+                    <a:lstStyle/>
+                    <a:p>
+                      <a:pPr algn="ctr"/>
+                      <a:r>
+                        <a:rPr lang="zh-CN" altLang="en-US" sz="1800" b="0" i="0" kern="1200" dirty="0">
+                          <a:solidFill>
+                            <a:schemeClr val="dk1"/>
+                          </a:solidFill>
+                          <a:effectLst/>
+                          <a:latin typeface="+mn-lt"/>
+                          <a:ea typeface="+mn-ea"/>
+                          <a:cs typeface="+mn-cs"/>
+                        </a:rPr>
+                        <a:t>不能阻塞，工作量必须短且有上界</a:t>
+                      </a:r>
+                      <a:endParaRPr lang="zh-SG" altLang="en-US" dirty="0"/>
+                    </a:p>
+                  </a:txBody>
+                  <a:tcPr anchor="ctr"/>
+                </a:tc>
+                <a:extLst>
+                  <a:ext uri="{0D108BD9-81ED-4DB2-BD59-A6C34878D82A}">
+                    <a16:rowId xmlns:a16="http://schemas.microsoft.com/office/drawing/2014/main" val="3697455354"/>
+                  </a:ext>
+                </a:extLst>
+              </a:tr>
+              <a:tr h="370840">
+                <a:tc>
+                  <a:txBody>
+                    <a:bodyPr/>
+                    <a:lstStyle/>
+                    <a:p>
+                      <a:pPr algn="ctr"/>
+                      <a:r>
+                        <a:rPr lang="en-US" altLang="zh-CN" dirty="0"/>
+                        <a:t>DMA</a:t>
+                      </a:r>
+                      <a:endParaRPr lang="zh-SG" altLang="en-US" dirty="0"/>
+                    </a:p>
+                  </a:txBody>
+                  <a:tcPr anchor="ctr"/>
+                </a:tc>
+                <a:tc>
+                  <a:txBody>
+                    <a:bodyPr/>
+                    <a:lstStyle/>
+                    <a:p>
+                      <a:pPr algn="ctr"/>
+                      <a:r>
+                        <a:rPr lang="zh-CN" altLang="en-US" sz="1800" b="0" i="0" kern="1200" dirty="0">
+                          <a:solidFill>
+                            <a:schemeClr val="dk1"/>
+                          </a:solidFill>
+                          <a:effectLst/>
+                          <a:latin typeface="+mn-lt"/>
+                          <a:ea typeface="+mn-ea"/>
+                          <a:cs typeface="+mn-cs"/>
+                        </a:rPr>
+                        <a:t>在外设与内存之间搬运数据</a:t>
+                      </a:r>
+                      <a:endParaRPr lang="zh-SG" altLang="en-US" dirty="0"/>
+                    </a:p>
+                  </a:txBody>
+                  <a:tcPr anchor="ctr"/>
+                </a:tc>
+                <a:tc>
+                  <a:txBody>
+                    <a:bodyPr/>
+                    <a:lstStyle/>
+                    <a:p>
+                      <a:pPr algn="ctr"/>
+                      <a:r>
+                        <a:rPr lang="zh-CN" altLang="en-US" sz="1800" b="0" i="0" kern="1200" dirty="0">
+                          <a:solidFill>
+                            <a:schemeClr val="dk1"/>
+                          </a:solidFill>
+                          <a:effectLst/>
+                          <a:latin typeface="+mn-lt"/>
+                          <a:ea typeface="+mn-ea"/>
+                          <a:cs typeface="+mn-cs"/>
+                        </a:rPr>
+                        <a:t>与 </a:t>
+                      </a:r>
+                      <a:r>
+                        <a:rPr lang="en-US" altLang="zh-CN" sz="1800" b="0" i="0" kern="1200" dirty="0">
+                          <a:solidFill>
+                            <a:schemeClr val="dk1"/>
+                          </a:solidFill>
+                          <a:effectLst/>
+                          <a:latin typeface="+mn-lt"/>
+                          <a:ea typeface="+mn-ea"/>
+                          <a:cs typeface="+mn-cs"/>
+                        </a:rPr>
+                        <a:t>CPU </a:t>
+                      </a:r>
+                      <a:r>
+                        <a:rPr lang="zh-CN" altLang="en-US" sz="1800" b="0" i="0" kern="1200" dirty="0">
+                          <a:solidFill>
+                            <a:schemeClr val="dk1"/>
+                          </a:solidFill>
+                          <a:effectLst/>
+                          <a:latin typeface="+mn-lt"/>
+                          <a:ea typeface="+mn-ea"/>
+                          <a:cs typeface="+mn-cs"/>
+                        </a:rPr>
+                        <a:t>并发访问内存</a:t>
+                      </a:r>
+                      <a:endParaRPr lang="zh-SG" altLang="en-US" dirty="0"/>
+                    </a:p>
+                  </a:txBody>
+                  <a:tcPr anchor="ctr"/>
+                </a:tc>
+                <a:extLst>
+                  <a:ext uri="{0D108BD9-81ED-4DB2-BD59-A6C34878D82A}">
+                    <a16:rowId xmlns:a16="http://schemas.microsoft.com/office/drawing/2014/main" val="2255013852"/>
+                  </a:ext>
+                </a:extLst>
+              </a:tr>
+            </a:tbl>
+          </a:graphicData>
+        </a:graphic>
+      </p:graphicFrame>
+      <p:sp>
+        <p:nvSpPr>
+          <p:cNvPr id="6" name="文本框 5">
+            <a:extLst>
+              <a:ext uri="{FF2B5EF4-FFF2-40B4-BE49-F238E27FC236}">
+                <a16:creationId xmlns:a16="http://schemas.microsoft.com/office/drawing/2014/main" id="{37E743DE-BEAF-CB11-413E-264F8AE83832}"/>
+              </a:ext>
+            </a:extLst>
+          </p:cNvPr>
+          <p:cNvSpPr txBox="1"/>
+          <p:nvPr/>
+        </p:nvSpPr>
+        <p:spPr>
+          <a:xfrm>
+            <a:off x="1150528" y="1690688"/>
+            <a:ext cx="9890939" cy="1384995"/>
+          </a:xfrm>
+          <a:prstGeom prst="rect">
+            <a:avLst/>
+          </a:prstGeom>
+          <a:noFill/>
+        </p:spPr>
+        <p:txBody>
+          <a:bodyPr wrap="square" rtlCol="0">
+            <a:spAutoFit/>
+          </a:bodyPr>
+          <a:lstStyle/>
+          <a:p>
+            <a:r>
+              <a:rPr lang="zh-CN" altLang="en-US" sz="2800" dirty="0"/>
+              <a:t>单核照样会有竞态，差别只是竞争发生在不同上下文切换之间，不是多个核心同时执行。</a:t>
+            </a:r>
+            <a:r>
+              <a:rPr lang="en-US" altLang="zh-CN" sz="2800" dirty="0"/>
+              <a:t>ISR</a:t>
+            </a:r>
+            <a:r>
+              <a:rPr lang="zh-CN" altLang="en-US" sz="2800" dirty="0"/>
+              <a:t>抢占线程、</a:t>
+            </a:r>
+            <a:r>
+              <a:rPr lang="en-US" altLang="zh-CN" sz="2800" dirty="0"/>
+              <a:t>DMA/</a:t>
+            </a:r>
+            <a:r>
+              <a:rPr lang="zh-CN" altLang="en-US" sz="2800" dirty="0"/>
+              <a:t>外设按各自的节奏工作、线程与中断共享状态时的数据交接等问题都需要解决。</a:t>
+            </a:r>
+            <a:endParaRPr lang="zh-SG" altLang="en-US" sz="2800" dirty="0"/>
           </a:p>
         </p:txBody>
       </p:sp>
     </p:spTree>
     <p:extLst>
       <p:ext uri="{BB962C8B-B14F-4D97-AF65-F5344CB8AC3E}">
-        <p14:creationId xmlns:p14="http://schemas.microsoft.com/office/powerpoint/2010/main" val="131490328"/>
+        <p14:creationId xmlns:p14="http://schemas.microsoft.com/office/powerpoint/2010/main" val="815869070"/>
       </p:ext>
     </p:extLst>
   </p:cSld>
